--- a/outdoor_seld_e2e/md/seminar/ゼミ相談スライド_2026-09-15.pptx
+++ b/outdoor_seld_e2e/md/seminar/ゼミ相談スライド_2026-09-15.pptx
@@ -5,18 +5,18 @@
     <p:sldMasterId id="2147483648" r:id="rId1"/>
   </p:sldMasterIdLst>
   <p:sldIdLst>
-    <p:sldId id="256" r:id="rId7"/>
-    <p:sldId id="257" r:id="rId8"/>
-    <p:sldId id="258" r:id="rId9"/>
-    <p:sldId id="259" r:id="rId10"/>
-    <p:sldId id="260" r:id="rId11"/>
-    <p:sldId id="261" r:id="rId12"/>
-    <p:sldId id="262" r:id="rId13"/>
-    <p:sldId id="263" r:id="rId14"/>
-    <p:sldId id="264" r:id="rId15"/>
-    <p:sldId id="265" r:id="rId16"/>
+    <p:sldId id="256" r:id="rId2"/>
+    <p:sldId id="257" r:id="rId3"/>
+    <p:sldId id="258" r:id="rId4"/>
+    <p:sldId id="259" r:id="rId5"/>
+    <p:sldId id="260" r:id="rId6"/>
+    <p:sldId id="261" r:id="rId7"/>
+    <p:sldId id="262" r:id="rId8"/>
+    <p:sldId id="263" r:id="rId9"/>
+    <p:sldId id="264" r:id="rId10"/>
+    <p:sldId id="265" r:id="rId11"/>
   </p:sldIdLst>
-  <p:sldSz cx="12191695" cy="6858000" type="screen4x3"/>
+  <p:sldSz cx="12192000" cy="6858000"/>
   <p:notesSz cx="6858000" cy="9144000"/>
   <p:defaultTextStyle>
     <a:defPPr>
@@ -113,6 +113,22 @@
       </a:defRPr>
     </a:lvl9pPr>
   </p:defaultTextStyle>
+  <p:extLst>
+    <p:ext uri="{EFAFB233-063F-42B5-8137-9DF3F51BA10A}">
+      <p15:sldGuideLst xmlns:p15="http://schemas.microsoft.com/office/powerpoint/2012/main">
+        <p15:guide id="1" orient="horz" pos="2160">
+          <p15:clr>
+            <a:srgbClr val="A4A3A4"/>
+          </p15:clr>
+        </p15:guide>
+        <p15:guide id="2" pos="2880">
+          <p15:clr>
+            <a:srgbClr val="A4A3A4"/>
+          </p15:clr>
+        </p15:guide>
+      </p15:sldGuideLst>
+    </p:ext>
+  </p:extLst>
 </p:presentation>
 </file>
 
@@ -154,10 +170,9 @@
           <a:lstStyle/>
           <a:p>
             <a:r>
-              <a:rPr lang="en-US" smtClean="0"/>
+              <a:rPr lang="en-US"/>
               <a:t>Click to edit Master title style</a:t>
             </a:r>
-            <a:endParaRPr lang="en-US"/>
           </a:p>
         </p:txBody>
       </p:sp>
@@ -273,10 +288,9 @@
           </a:lstStyle>
           <a:p>
             <a:r>
-              <a:rPr lang="en-US" smtClean="0"/>
+              <a:rPr lang="en-US"/>
               <a:t>Click to edit Master subtitle style</a:t>
             </a:r>
-            <a:endParaRPr lang="en-US"/>
           </a:p>
         </p:txBody>
       </p:sp>
@@ -297,7 +311,7 @@
           <a:p>
             <a:fld id="{5BCAD085-E8A6-8845-BD4E-CB4CCA059FC4}" type="datetimeFigureOut">
               <a:rPr lang="en-US" smtClean="0"/>
-              <a:t>1/27/13</a:t>
+              <a:t>9/3/2026</a:t>
             </a:fld>
             <a:endParaRPr lang="en-US"/>
           </a:p>
@@ -391,10 +405,9 @@
           <a:lstStyle/>
           <a:p>
             <a:r>
-              <a:rPr lang="en-US" smtClean="0"/>
+              <a:rPr lang="en-US"/>
               <a:t>Click to edit Master title style</a:t>
             </a:r>
-            <a:endParaRPr lang="en-US"/>
           </a:p>
         </p:txBody>
       </p:sp>
@@ -415,38 +428,37 @@
           <a:p>
             <a:pPr lvl="0"/>
             <a:r>
-              <a:rPr lang="en-US" smtClean="0"/>
+              <a:rPr lang="en-US"/>
               <a:t>Click to edit Master text styles</a:t>
             </a:r>
           </a:p>
           <a:p>
             <a:pPr lvl="1"/>
             <a:r>
-              <a:rPr lang="en-US" smtClean="0"/>
+              <a:rPr lang="en-US"/>
               <a:t>Second level</a:t>
             </a:r>
           </a:p>
           <a:p>
             <a:pPr lvl="2"/>
             <a:r>
-              <a:rPr lang="en-US" smtClean="0"/>
+              <a:rPr lang="en-US"/>
               <a:t>Third level</a:t>
             </a:r>
           </a:p>
           <a:p>
             <a:pPr lvl="3"/>
             <a:r>
-              <a:rPr lang="en-US" smtClean="0"/>
+              <a:rPr lang="en-US"/>
               <a:t>Fourth level</a:t>
             </a:r>
           </a:p>
           <a:p>
             <a:pPr lvl="4"/>
             <a:r>
-              <a:rPr lang="en-US" smtClean="0"/>
+              <a:rPr lang="en-US"/>
               <a:t>Fifth level</a:t>
             </a:r>
-            <a:endParaRPr lang="en-US"/>
           </a:p>
         </p:txBody>
       </p:sp>
@@ -467,7 +479,7 @@
           <a:p>
             <a:fld id="{5BCAD085-E8A6-8845-BD4E-CB4CCA059FC4}" type="datetimeFigureOut">
               <a:rPr lang="en-US" smtClean="0"/>
-              <a:t>1/27/13</a:t>
+              <a:t>9/3/2026</a:t>
             </a:fld>
             <a:endParaRPr lang="en-US"/>
           </a:p>
@@ -566,10 +578,9 @@
           <a:lstStyle/>
           <a:p>
             <a:r>
-              <a:rPr lang="en-US" smtClean="0"/>
+              <a:rPr lang="en-US"/>
               <a:t>Click to edit Master title style</a:t>
             </a:r>
-            <a:endParaRPr lang="en-US"/>
           </a:p>
         </p:txBody>
       </p:sp>
@@ -595,38 +606,37 @@
           <a:p>
             <a:pPr lvl="0"/>
             <a:r>
-              <a:rPr lang="en-US" smtClean="0"/>
+              <a:rPr lang="en-US"/>
               <a:t>Click to edit Master text styles</a:t>
             </a:r>
           </a:p>
           <a:p>
             <a:pPr lvl="1"/>
             <a:r>
-              <a:rPr lang="en-US" smtClean="0"/>
+              <a:rPr lang="en-US"/>
               <a:t>Second level</a:t>
             </a:r>
           </a:p>
           <a:p>
             <a:pPr lvl="2"/>
             <a:r>
-              <a:rPr lang="en-US" smtClean="0"/>
+              <a:rPr lang="en-US"/>
               <a:t>Third level</a:t>
             </a:r>
           </a:p>
           <a:p>
             <a:pPr lvl="3"/>
             <a:r>
-              <a:rPr lang="en-US" smtClean="0"/>
+              <a:rPr lang="en-US"/>
               <a:t>Fourth level</a:t>
             </a:r>
           </a:p>
           <a:p>
             <a:pPr lvl="4"/>
             <a:r>
-              <a:rPr lang="en-US" smtClean="0"/>
+              <a:rPr lang="en-US"/>
               <a:t>Fifth level</a:t>
             </a:r>
-            <a:endParaRPr lang="en-US"/>
           </a:p>
         </p:txBody>
       </p:sp>
@@ -647,7 +657,7 @@
           <a:p>
             <a:fld id="{5BCAD085-E8A6-8845-BD4E-CB4CCA059FC4}" type="datetimeFigureOut">
               <a:rPr lang="en-US" smtClean="0"/>
-              <a:t>1/27/13</a:t>
+              <a:t>9/3/2026</a:t>
             </a:fld>
             <a:endParaRPr lang="en-US"/>
           </a:p>
@@ -741,10 +751,9 @@
           <a:lstStyle/>
           <a:p>
             <a:r>
-              <a:rPr lang="en-US" smtClean="0"/>
+              <a:rPr lang="en-US"/>
               <a:t>Click to edit Master title style</a:t>
             </a:r>
-            <a:endParaRPr lang="en-US"/>
           </a:p>
         </p:txBody>
       </p:sp>
@@ -765,38 +774,37 @@
           <a:p>
             <a:pPr lvl="0"/>
             <a:r>
-              <a:rPr lang="en-US" smtClean="0"/>
+              <a:rPr lang="en-US"/>
               <a:t>Click to edit Master text styles</a:t>
             </a:r>
           </a:p>
           <a:p>
             <a:pPr lvl="1"/>
             <a:r>
-              <a:rPr lang="en-US" smtClean="0"/>
+              <a:rPr lang="en-US"/>
               <a:t>Second level</a:t>
             </a:r>
           </a:p>
           <a:p>
             <a:pPr lvl="2"/>
             <a:r>
-              <a:rPr lang="en-US" smtClean="0"/>
+              <a:rPr lang="en-US"/>
               <a:t>Third level</a:t>
             </a:r>
           </a:p>
           <a:p>
             <a:pPr lvl="3"/>
             <a:r>
-              <a:rPr lang="en-US" smtClean="0"/>
+              <a:rPr lang="en-US"/>
               <a:t>Fourth level</a:t>
             </a:r>
           </a:p>
           <a:p>
             <a:pPr lvl="4"/>
             <a:r>
-              <a:rPr lang="en-US" smtClean="0"/>
+              <a:rPr lang="en-US"/>
               <a:t>Fifth level</a:t>
             </a:r>
-            <a:endParaRPr lang="en-US"/>
           </a:p>
         </p:txBody>
       </p:sp>
@@ -817,7 +825,7 @@
           <a:p>
             <a:fld id="{5BCAD085-E8A6-8845-BD4E-CB4CCA059FC4}" type="datetimeFigureOut">
               <a:rPr lang="en-US" smtClean="0"/>
-              <a:t>1/27/13</a:t>
+              <a:t>9/3/2026</a:t>
             </a:fld>
             <a:endParaRPr lang="en-US"/>
           </a:p>
@@ -920,10 +928,9 @@
           </a:lstStyle>
           <a:p>
             <a:r>
-              <a:rPr lang="en-US" smtClean="0"/>
+              <a:rPr lang="en-US"/>
               <a:t>Click to edit Master title style</a:t>
             </a:r>
-            <a:endParaRPr lang="en-US"/>
           </a:p>
         </p:txBody>
       </p:sp>
@@ -1040,7 +1047,7 @@
           <a:p>
             <a:pPr lvl="0"/>
             <a:r>
-              <a:rPr lang="en-US" smtClean="0"/>
+              <a:rPr lang="en-US"/>
               <a:t>Click to edit Master text styles</a:t>
             </a:r>
           </a:p>
@@ -1063,7 +1070,7 @@
           <a:p>
             <a:fld id="{5BCAD085-E8A6-8845-BD4E-CB4CCA059FC4}" type="datetimeFigureOut">
               <a:rPr lang="en-US" smtClean="0"/>
-              <a:t>1/27/13</a:t>
+              <a:t>9/3/2026</a:t>
             </a:fld>
             <a:endParaRPr lang="en-US"/>
           </a:p>
@@ -1157,10 +1164,9 @@
           <a:lstStyle/>
           <a:p>
             <a:r>
-              <a:rPr lang="en-US" smtClean="0"/>
+              <a:rPr lang="en-US"/>
               <a:t>Click to edit Master title style</a:t>
             </a:r>
-            <a:endParaRPr lang="en-US"/>
           </a:p>
         </p:txBody>
       </p:sp>
@@ -1214,38 +1220,37 @@
           <a:p>
             <a:pPr lvl="0"/>
             <a:r>
-              <a:rPr lang="en-US" smtClean="0"/>
+              <a:rPr lang="en-US"/>
               <a:t>Click to edit Master text styles</a:t>
             </a:r>
           </a:p>
           <a:p>
             <a:pPr lvl="1"/>
             <a:r>
-              <a:rPr lang="en-US" smtClean="0"/>
+              <a:rPr lang="en-US"/>
               <a:t>Second level</a:t>
             </a:r>
           </a:p>
           <a:p>
             <a:pPr lvl="2"/>
             <a:r>
-              <a:rPr lang="en-US" smtClean="0"/>
+              <a:rPr lang="en-US"/>
               <a:t>Third level</a:t>
             </a:r>
           </a:p>
           <a:p>
             <a:pPr lvl="3"/>
             <a:r>
-              <a:rPr lang="en-US" smtClean="0"/>
+              <a:rPr lang="en-US"/>
               <a:t>Fourth level</a:t>
             </a:r>
           </a:p>
           <a:p>
             <a:pPr lvl="4"/>
             <a:r>
-              <a:rPr lang="en-US" smtClean="0"/>
+              <a:rPr lang="en-US"/>
               <a:t>Fifth level</a:t>
             </a:r>
-            <a:endParaRPr lang="en-US"/>
           </a:p>
         </p:txBody>
       </p:sp>
@@ -1299,38 +1304,37 @@
           <a:p>
             <a:pPr lvl="0"/>
             <a:r>
-              <a:rPr lang="en-US" smtClean="0"/>
+              <a:rPr lang="en-US"/>
               <a:t>Click to edit Master text styles</a:t>
             </a:r>
           </a:p>
           <a:p>
             <a:pPr lvl="1"/>
             <a:r>
-              <a:rPr lang="en-US" smtClean="0"/>
+              <a:rPr lang="en-US"/>
               <a:t>Second level</a:t>
             </a:r>
           </a:p>
           <a:p>
             <a:pPr lvl="2"/>
             <a:r>
-              <a:rPr lang="en-US" smtClean="0"/>
+              <a:rPr lang="en-US"/>
               <a:t>Third level</a:t>
             </a:r>
           </a:p>
           <a:p>
             <a:pPr lvl="3"/>
             <a:r>
-              <a:rPr lang="en-US" smtClean="0"/>
+              <a:rPr lang="en-US"/>
               <a:t>Fourth level</a:t>
             </a:r>
           </a:p>
           <a:p>
             <a:pPr lvl="4"/>
             <a:r>
-              <a:rPr lang="en-US" smtClean="0"/>
+              <a:rPr lang="en-US"/>
               <a:t>Fifth level</a:t>
             </a:r>
-            <a:endParaRPr lang="en-US"/>
           </a:p>
         </p:txBody>
       </p:sp>
@@ -1351,7 +1355,7 @@
           <a:p>
             <a:fld id="{5BCAD085-E8A6-8845-BD4E-CB4CCA059FC4}" type="datetimeFigureOut">
               <a:rPr lang="en-US" smtClean="0"/>
-              <a:t>1/27/13</a:t>
+              <a:t>9/3/2026</a:t>
             </a:fld>
             <a:endParaRPr lang="en-US"/>
           </a:p>
@@ -1449,10 +1453,9 @@
           </a:lstStyle>
           <a:p>
             <a:r>
-              <a:rPr lang="en-US" smtClean="0"/>
+              <a:rPr lang="en-US"/>
               <a:t>Click to edit Master title style</a:t>
             </a:r>
-            <a:endParaRPr lang="en-US"/>
           </a:p>
         </p:txBody>
       </p:sp>
@@ -1515,7 +1518,7 @@
           <a:p>
             <a:pPr lvl="0"/>
             <a:r>
-              <a:rPr lang="en-US" smtClean="0"/>
+              <a:rPr lang="en-US"/>
               <a:t>Click to edit Master text styles</a:t>
             </a:r>
           </a:p>
@@ -1571,38 +1574,37 @@
           <a:p>
             <a:pPr lvl="0"/>
             <a:r>
-              <a:rPr lang="en-US" smtClean="0"/>
+              <a:rPr lang="en-US"/>
               <a:t>Click to edit Master text styles</a:t>
             </a:r>
           </a:p>
           <a:p>
             <a:pPr lvl="1"/>
             <a:r>
-              <a:rPr lang="en-US" smtClean="0"/>
+              <a:rPr lang="en-US"/>
               <a:t>Second level</a:t>
             </a:r>
           </a:p>
           <a:p>
             <a:pPr lvl="2"/>
             <a:r>
-              <a:rPr lang="en-US" smtClean="0"/>
+              <a:rPr lang="en-US"/>
               <a:t>Third level</a:t>
             </a:r>
           </a:p>
           <a:p>
             <a:pPr lvl="3"/>
             <a:r>
-              <a:rPr lang="en-US" smtClean="0"/>
+              <a:rPr lang="en-US"/>
               <a:t>Fourth level</a:t>
             </a:r>
           </a:p>
           <a:p>
             <a:pPr lvl="4"/>
             <a:r>
-              <a:rPr lang="en-US" smtClean="0"/>
+              <a:rPr lang="en-US"/>
               <a:t>Fifth level</a:t>
             </a:r>
-            <a:endParaRPr lang="en-US"/>
           </a:p>
         </p:txBody>
       </p:sp>
@@ -1665,7 +1667,7 @@
           <a:p>
             <a:pPr lvl="0"/>
             <a:r>
-              <a:rPr lang="en-US" smtClean="0"/>
+              <a:rPr lang="en-US"/>
               <a:t>Click to edit Master text styles</a:t>
             </a:r>
           </a:p>
@@ -1721,38 +1723,37 @@
           <a:p>
             <a:pPr lvl="0"/>
             <a:r>
-              <a:rPr lang="en-US" smtClean="0"/>
+              <a:rPr lang="en-US"/>
               <a:t>Click to edit Master text styles</a:t>
             </a:r>
           </a:p>
           <a:p>
             <a:pPr lvl="1"/>
             <a:r>
-              <a:rPr lang="en-US" smtClean="0"/>
+              <a:rPr lang="en-US"/>
               <a:t>Second level</a:t>
             </a:r>
           </a:p>
           <a:p>
             <a:pPr lvl="2"/>
             <a:r>
-              <a:rPr lang="en-US" smtClean="0"/>
+              <a:rPr lang="en-US"/>
               <a:t>Third level</a:t>
             </a:r>
           </a:p>
           <a:p>
             <a:pPr lvl="3"/>
             <a:r>
-              <a:rPr lang="en-US" smtClean="0"/>
+              <a:rPr lang="en-US"/>
               <a:t>Fourth level</a:t>
             </a:r>
           </a:p>
           <a:p>
             <a:pPr lvl="4"/>
             <a:r>
-              <a:rPr lang="en-US" smtClean="0"/>
+              <a:rPr lang="en-US"/>
               <a:t>Fifth level</a:t>
             </a:r>
-            <a:endParaRPr lang="en-US"/>
           </a:p>
         </p:txBody>
       </p:sp>
@@ -1773,7 +1774,7 @@
           <a:p>
             <a:fld id="{5BCAD085-E8A6-8845-BD4E-CB4CCA059FC4}" type="datetimeFigureOut">
               <a:rPr lang="en-US" smtClean="0"/>
-              <a:t>1/27/13</a:t>
+              <a:t>9/3/2026</a:t>
             </a:fld>
             <a:endParaRPr lang="en-US"/>
           </a:p>
@@ -1867,10 +1868,9 @@
           <a:lstStyle/>
           <a:p>
             <a:r>
-              <a:rPr lang="en-US" smtClean="0"/>
+              <a:rPr lang="en-US"/>
               <a:t>Click to edit Master title style</a:t>
             </a:r>
-            <a:endParaRPr lang="en-US"/>
           </a:p>
         </p:txBody>
       </p:sp>
@@ -1891,7 +1891,7 @@
           <a:p>
             <a:fld id="{5BCAD085-E8A6-8845-BD4E-CB4CCA059FC4}" type="datetimeFigureOut">
               <a:rPr lang="en-US" smtClean="0"/>
-              <a:t>1/27/13</a:t>
+              <a:t>9/3/2026</a:t>
             </a:fld>
             <a:endParaRPr lang="en-US"/>
           </a:p>
@@ -1986,7 +1986,7 @@
           <a:p>
             <a:fld id="{5BCAD085-E8A6-8845-BD4E-CB4CCA059FC4}" type="datetimeFigureOut">
               <a:rPr lang="en-US" smtClean="0"/>
-              <a:t>1/27/13</a:t>
+              <a:t>9/3/2026</a:t>
             </a:fld>
             <a:endParaRPr lang="en-US"/>
           </a:p>
@@ -2089,10 +2089,9 @@
           </a:lstStyle>
           <a:p>
             <a:r>
-              <a:rPr lang="en-US" smtClean="0"/>
+              <a:rPr lang="en-US"/>
               <a:t>Click to edit Master title style</a:t>
             </a:r>
-            <a:endParaRPr lang="en-US"/>
           </a:p>
         </p:txBody>
       </p:sp>
@@ -2146,38 +2145,37 @@
           <a:p>
             <a:pPr lvl="0"/>
             <a:r>
-              <a:rPr lang="en-US" smtClean="0"/>
+              <a:rPr lang="en-US"/>
               <a:t>Click to edit Master text styles</a:t>
             </a:r>
           </a:p>
           <a:p>
             <a:pPr lvl="1"/>
             <a:r>
-              <a:rPr lang="en-US" smtClean="0"/>
+              <a:rPr lang="en-US"/>
               <a:t>Second level</a:t>
             </a:r>
           </a:p>
           <a:p>
             <a:pPr lvl="2"/>
             <a:r>
-              <a:rPr lang="en-US" smtClean="0"/>
+              <a:rPr lang="en-US"/>
               <a:t>Third level</a:t>
             </a:r>
           </a:p>
           <a:p>
             <a:pPr lvl="3"/>
             <a:r>
-              <a:rPr lang="en-US" smtClean="0"/>
+              <a:rPr lang="en-US"/>
               <a:t>Fourth level</a:t>
             </a:r>
           </a:p>
           <a:p>
             <a:pPr lvl="4"/>
             <a:r>
-              <a:rPr lang="en-US" smtClean="0"/>
+              <a:rPr lang="en-US"/>
               <a:t>Fifth level</a:t>
             </a:r>
-            <a:endParaRPr lang="en-US"/>
           </a:p>
         </p:txBody>
       </p:sp>
@@ -2240,7 +2238,7 @@
           <a:p>
             <a:pPr lvl="0"/>
             <a:r>
-              <a:rPr lang="en-US" smtClean="0"/>
+              <a:rPr lang="en-US"/>
               <a:t>Click to edit Master text styles</a:t>
             </a:r>
           </a:p>
@@ -2263,7 +2261,7 @@
           <a:p>
             <a:fld id="{5BCAD085-E8A6-8845-BD4E-CB4CCA059FC4}" type="datetimeFigureOut">
               <a:rPr lang="en-US" smtClean="0"/>
-              <a:t>1/27/13</a:t>
+              <a:t>9/3/2026</a:t>
             </a:fld>
             <a:endParaRPr lang="en-US"/>
           </a:p>
@@ -2366,10 +2364,9 @@
           </a:lstStyle>
           <a:p>
             <a:r>
-              <a:rPr lang="en-US" smtClean="0"/>
+              <a:rPr lang="en-US"/>
               <a:t>Click to edit Master title style</a:t>
             </a:r>
-            <a:endParaRPr lang="en-US"/>
           </a:p>
         </p:txBody>
       </p:sp>
@@ -2493,7 +2490,7 @@
           <a:p>
             <a:pPr lvl="0"/>
             <a:r>
-              <a:rPr lang="en-US" smtClean="0"/>
+              <a:rPr lang="en-US"/>
               <a:t>Click to edit Master text styles</a:t>
             </a:r>
           </a:p>
@@ -2516,7 +2513,7 @@
           <a:p>
             <a:fld id="{5BCAD085-E8A6-8845-BD4E-CB4CCA059FC4}" type="datetimeFigureOut">
               <a:rPr lang="en-US" smtClean="0"/>
-              <a:t>1/27/13</a:t>
+              <a:t>9/3/2026</a:t>
             </a:fld>
             <a:endParaRPr lang="en-US"/>
           </a:p>
@@ -2625,10 +2622,9 @@
           <a:lstStyle/>
           <a:p>
             <a:r>
-              <a:rPr lang="en-US" smtClean="0"/>
+              <a:rPr lang="en-US"/>
               <a:t>Click to edit Master title style</a:t>
             </a:r>
-            <a:endParaRPr lang="en-US"/>
           </a:p>
         </p:txBody>
       </p:sp>
@@ -2659,38 +2655,37 @@
           <a:p>
             <a:pPr lvl="0"/>
             <a:r>
-              <a:rPr lang="en-US" smtClean="0"/>
+              <a:rPr lang="en-US"/>
               <a:t>Click to edit Master text styles</a:t>
             </a:r>
           </a:p>
           <a:p>
             <a:pPr lvl="1"/>
             <a:r>
-              <a:rPr lang="en-US" smtClean="0"/>
+              <a:rPr lang="en-US"/>
               <a:t>Second level</a:t>
             </a:r>
           </a:p>
           <a:p>
             <a:pPr lvl="2"/>
             <a:r>
-              <a:rPr lang="en-US" smtClean="0"/>
+              <a:rPr lang="en-US"/>
               <a:t>Third level</a:t>
             </a:r>
           </a:p>
           <a:p>
             <a:pPr lvl="3"/>
             <a:r>
-              <a:rPr lang="en-US" smtClean="0"/>
+              <a:rPr lang="en-US"/>
               <a:t>Fourth level</a:t>
             </a:r>
           </a:p>
           <a:p>
             <a:pPr lvl="4"/>
             <a:r>
-              <a:rPr lang="en-US" smtClean="0"/>
+              <a:rPr lang="en-US"/>
               <a:t>Fifth level</a:t>
             </a:r>
-            <a:endParaRPr lang="en-US"/>
           </a:p>
         </p:txBody>
       </p:sp>
@@ -2729,7 +2724,7 @@
           <a:p>
             <a:fld id="{5BCAD085-E8A6-8845-BD4E-CB4CCA059FC4}" type="datetimeFigureOut">
               <a:rPr lang="en-US" smtClean="0"/>
-              <a:t>1/27/13</a:t>
+              <a:t>9/3/2026</a:t>
             </a:fld>
             <a:endParaRPr lang="en-US"/>
           </a:p>
@@ -3088,7 +3083,7 @@
 </file>
 
 <file path=ppt/slides/slide1.xml><?xml version="1.0" encoding="utf-8"?>
-<p:sld xmlns:a="http://schemas.openxmlformats.org/drawingml/2006/main" xmlns:p="http://schemas.openxmlformats.org/presentationml/2006/main" xmlns:r="http://schemas.openxmlformats.org/officeDocument/2006/relationships">
+<p:sld xmlns:a="http://schemas.openxmlformats.org/drawingml/2006/main" xmlns:r="http://schemas.openxmlformats.org/officeDocument/2006/relationships" xmlns:p="http://schemas.openxmlformats.org/presentationml/2006/main">
   <p:cSld>
     <p:spTree>
       <p:nvGrpSpPr>
@@ -3096,7 +3091,14 @@
         <p:cNvGrpSpPr/>
         <p:nvPr/>
       </p:nvGrpSpPr>
-      <p:grpSpPr/>
+      <p:grpSpPr>
+        <a:xfrm>
+          <a:off x="0" y="0"/>
+          <a:ext cx="0" cy="0"/>
+          <a:chOff x="0" y="0"/>
+          <a:chExt cx="0" cy="0"/>
+        </a:xfrm>
+      </p:grpSpPr>
       <p:sp>
         <p:nvSpPr>
           <p:cNvPr id="2" name="Rectangle 1"/>
@@ -3138,6 +3140,7 @@
           <a:lstStyle/>
           <a:p>
             <a:pPr algn="ctr"/>
+            <a:endParaRPr/>
           </a:p>
         </p:txBody>
       </p:sp>
@@ -3182,6 +3185,7 @@
           <a:lstStyle/>
           <a:p>
             <a:pPr algn="ctr"/>
+            <a:endParaRPr/>
           </a:p>
         </p:txBody>
       </p:sp>
@@ -3202,7 +3206,7 @@
           <a:noFill/>
         </p:spPr>
         <p:txBody>
-          <a:bodyPr wrap="square" anchor="t" lIns="25400" rIns="25400" tIns="12700" bIns="12700">
+          <a:bodyPr wrap="square" lIns="25400" tIns="12700" rIns="25400" bIns="12700" anchor="t">
             <a:spAutoFit/>
           </a:bodyPr>
           <a:lstStyle/>
@@ -3262,6 +3266,7 @@
           <a:lstStyle/>
           <a:p>
             <a:pPr algn="ctr"/>
+            <a:endParaRPr/>
           </a:p>
         </p:txBody>
       </p:sp>
@@ -3282,7 +3287,7 @@
           <a:noFill/>
         </p:spPr>
         <p:txBody>
-          <a:bodyPr wrap="square" anchor="t" lIns="25400" rIns="25400" tIns="12700" bIns="12700">
+          <a:bodyPr wrap="square" lIns="25400" tIns="12700" rIns="25400" bIns="12700" anchor="t">
             <a:spAutoFit/>
           </a:bodyPr>
           <a:lstStyle/>
@@ -3338,7 +3343,7 @@
           </a:fontRef>
         </p:style>
         <p:txBody>
-          <a:bodyPr rtlCol="0" anchor="ctr" wrap="square" lIns="38100" rIns="38100" tIns="0" bIns="0"/>
+          <a:bodyPr wrap="square" lIns="38100" tIns="0" rIns="38100" bIns="0" rtlCol="0" anchor="ctr"/>
           <a:lstStyle/>
           <a:p>
             <a:pPr algn="ctr"/>
@@ -3392,7 +3397,7 @@
           </a:fontRef>
         </p:style>
         <p:txBody>
-          <a:bodyPr rtlCol="0" anchor="ctr" wrap="square" lIns="38100" rIns="38100" tIns="0" bIns="0"/>
+          <a:bodyPr wrap="square" lIns="38100" tIns="0" rIns="38100" bIns="0" rtlCol="0" anchor="ctr"/>
           <a:lstStyle/>
           <a:p>
             <a:pPr algn="ctr"/>
@@ -3446,7 +3451,7 @@
           </a:fontRef>
         </p:style>
         <p:txBody>
-          <a:bodyPr rtlCol="0" anchor="ctr" wrap="square" lIns="38100" rIns="38100" tIns="0" bIns="0"/>
+          <a:bodyPr wrap="square" lIns="38100" tIns="0" rIns="38100" bIns="0" rtlCol="0" anchor="ctr"/>
           <a:lstStyle/>
           <a:p>
             <a:pPr algn="ctr"/>
@@ -3480,7 +3485,7 @@
           <a:noFill/>
         </p:spPr>
         <p:txBody>
-          <a:bodyPr wrap="square" anchor="t" lIns="25400" rIns="25400" tIns="12700" bIns="12700">
+          <a:bodyPr wrap="square" lIns="25400" tIns="12700" rIns="25400" bIns="12700" anchor="t">
             <a:spAutoFit/>
           </a:bodyPr>
           <a:lstStyle/>
@@ -3516,7 +3521,7 @@
           <a:noFill/>
         </p:spPr>
         <p:txBody>
-          <a:bodyPr wrap="square" anchor="t" lIns="25400" rIns="25400" tIns="12700" bIns="12700">
+          <a:bodyPr wrap="square" lIns="25400" tIns="12700" rIns="25400" bIns="12700" anchor="t">
             <a:spAutoFit/>
           </a:bodyPr>
           <a:lstStyle/>
@@ -3578,6 +3583,7 @@
           <a:lstStyle/>
           <a:p>
             <a:pPr algn="ctr"/>
+            <a:endParaRPr/>
           </a:p>
         </p:txBody>
       </p:sp>
@@ -3622,6 +3628,7 @@
           <a:lstStyle/>
           <a:p>
             <a:pPr algn="ctr"/>
+            <a:endParaRPr/>
           </a:p>
         </p:txBody>
       </p:sp>
@@ -3642,7 +3649,7 @@
           <a:noFill/>
         </p:spPr>
         <p:txBody>
-          <a:bodyPr wrap="square" anchor="t" lIns="25400" rIns="25400" tIns="12700" bIns="12700">
+          <a:bodyPr wrap="square" lIns="25400" tIns="12700" rIns="25400" bIns="12700" anchor="t">
             <a:spAutoFit/>
           </a:bodyPr>
           <a:lstStyle/>
@@ -3678,7 +3685,7 @@
           <a:noFill/>
         </p:spPr>
         <p:txBody>
-          <a:bodyPr wrap="square" anchor="t" lIns="25400" rIns="25400" tIns="12700" bIns="12700">
+          <a:bodyPr wrap="square" lIns="25400" tIns="12700" rIns="25400" bIns="12700" anchor="t">
             <a:spAutoFit/>
           </a:bodyPr>
           <a:lstStyle/>
@@ -3735,7 +3742,7 @@
           <a:noFill/>
         </p:spPr>
         <p:txBody>
-          <a:bodyPr wrap="square" anchor="t" lIns="25400" rIns="25400" tIns="12700" bIns="12700">
+          <a:bodyPr wrap="square" lIns="25400" tIns="12700" rIns="25400" bIns="12700" anchor="t">
             <a:spAutoFit/>
           </a:bodyPr>
           <a:lstStyle/>
@@ -3792,7 +3799,7 @@
           <a:noFill/>
         </p:spPr>
         <p:txBody>
-          <a:bodyPr wrap="square" anchor="t" lIns="25400" rIns="25400" tIns="12700" bIns="12700">
+          <a:bodyPr wrap="square" lIns="25400" tIns="12700" rIns="25400" bIns="12700" anchor="t">
             <a:spAutoFit/>
           </a:bodyPr>
           <a:lstStyle/>
@@ -3875,6 +3882,7 @@
           <a:lstStyle/>
           <a:p>
             <a:pPr algn="ctr"/>
+            <a:endParaRPr/>
           </a:p>
         </p:txBody>
       </p:sp>
@@ -3919,6 +3927,7 @@
           <a:lstStyle/>
           <a:p>
             <a:pPr algn="ctr"/>
+            <a:endParaRPr/>
           </a:p>
         </p:txBody>
       </p:sp>
@@ -3939,7 +3948,7 @@
           <a:noFill/>
         </p:spPr>
         <p:txBody>
-          <a:bodyPr wrap="square" anchor="t" lIns="25400" rIns="25400" tIns="12700" bIns="12700">
+          <a:bodyPr wrap="square" lIns="25400" tIns="12700" rIns="25400" bIns="12700" anchor="t">
             <a:spAutoFit/>
           </a:bodyPr>
           <a:lstStyle/>
@@ -3975,7 +3984,7 @@
           <a:noFill/>
         </p:spPr>
         <p:txBody>
-          <a:bodyPr wrap="square" anchor="t" lIns="25400" rIns="25400" tIns="12700" bIns="12700">
+          <a:bodyPr wrap="square" lIns="25400" tIns="12700" rIns="25400" bIns="12700" anchor="t">
             <a:spAutoFit/>
           </a:bodyPr>
           <a:lstStyle/>
@@ -4042,7 +4051,7 @@
           <a:noFill/>
         </p:spPr>
         <p:txBody>
-          <a:bodyPr wrap="square" anchor="t" lIns="25400" rIns="25400" tIns="12700" bIns="12700">
+          <a:bodyPr wrap="square" lIns="25400" tIns="12700" rIns="25400" bIns="12700" anchor="t">
             <a:spAutoFit/>
           </a:bodyPr>
           <a:lstStyle/>
@@ -4088,7 +4097,7 @@
           <a:noFill/>
         </p:spPr>
         <p:txBody>
-          <a:bodyPr wrap="square" anchor="t" lIns="25400" rIns="25400" tIns="12700" bIns="12700">
+          <a:bodyPr wrap="square" lIns="25400" tIns="12700" rIns="25400" bIns="12700" anchor="t">
             <a:spAutoFit/>
           </a:bodyPr>
           <a:lstStyle/>
@@ -4152,6 +4161,7 @@
           <a:lstStyle/>
           <a:p>
             <a:pPr algn="ctr"/>
+            <a:endParaRPr/>
           </a:p>
         </p:txBody>
       </p:sp>
@@ -4172,7 +4182,7 @@
           <a:noFill/>
         </p:spPr>
         <p:txBody>
-          <a:bodyPr wrap="square" anchor="t" lIns="25400" rIns="25400" tIns="12700" bIns="12700">
+          <a:bodyPr wrap="square" lIns="25400" tIns="12700" rIns="25400" bIns="12700" anchor="t">
             <a:spAutoFit/>
           </a:bodyPr>
           <a:lstStyle/>
@@ -4242,6 +4252,7 @@
           <a:lstStyle/>
           <a:p>
             <a:pPr algn="ctr"/>
+            <a:endParaRPr/>
           </a:p>
         </p:txBody>
       </p:sp>
@@ -4286,6 +4297,7 @@
           <a:lstStyle/>
           <a:p>
             <a:pPr algn="ctr"/>
+            <a:endParaRPr/>
           </a:p>
         </p:txBody>
       </p:sp>
@@ -4306,7 +4318,7 @@
           <a:noFill/>
         </p:spPr>
         <p:txBody>
-          <a:bodyPr wrap="square" anchor="t" lIns="25400" rIns="25400" tIns="12700" bIns="12700">
+          <a:bodyPr wrap="square" lIns="25400" tIns="12700" rIns="25400" bIns="12700" anchor="t">
             <a:spAutoFit/>
           </a:bodyPr>
           <a:lstStyle/>
@@ -4355,7 +4367,7 @@
 </file>
 
 <file path=ppt/slides/slide10.xml><?xml version="1.0" encoding="utf-8"?>
-<p:sld xmlns:a="http://schemas.openxmlformats.org/drawingml/2006/main" xmlns:p="http://schemas.openxmlformats.org/presentationml/2006/main" xmlns:r="http://schemas.openxmlformats.org/officeDocument/2006/relationships">
+<p:sld xmlns:a="http://schemas.openxmlformats.org/drawingml/2006/main" xmlns:r="http://schemas.openxmlformats.org/officeDocument/2006/relationships" xmlns:p="http://schemas.openxmlformats.org/presentationml/2006/main">
   <p:cSld>
     <p:spTree>
       <p:nvGrpSpPr>
@@ -4363,7 +4375,14 @@
         <p:cNvGrpSpPr/>
         <p:nvPr/>
       </p:nvGrpSpPr>
-      <p:grpSpPr/>
+      <p:grpSpPr>
+        <a:xfrm>
+          <a:off x="0" y="0"/>
+          <a:ext cx="0" cy="0"/>
+          <a:chOff x="0" y="0"/>
+          <a:chExt cx="0" cy="0"/>
+        </a:xfrm>
+      </p:grpSpPr>
       <p:sp>
         <p:nvSpPr>
           <p:cNvPr id="2" name="Rectangle 1"/>
@@ -4405,6 +4424,7 @@
           <a:lstStyle/>
           <a:p>
             <a:pPr algn="ctr"/>
+            <a:endParaRPr/>
           </a:p>
         </p:txBody>
       </p:sp>
@@ -4449,6 +4469,7 @@
           <a:lstStyle/>
           <a:p>
             <a:pPr algn="ctr"/>
+            <a:endParaRPr/>
           </a:p>
         </p:txBody>
       </p:sp>
@@ -4469,7 +4490,7 @@
           <a:noFill/>
         </p:spPr>
         <p:txBody>
-          <a:bodyPr wrap="square" anchor="t" lIns="25400" rIns="25400" tIns="12700" bIns="12700">
+          <a:bodyPr wrap="square" lIns="25400" tIns="12700" rIns="25400" bIns="12700" anchor="t">
             <a:spAutoFit/>
           </a:bodyPr>
           <a:lstStyle/>
@@ -4529,6 +4550,7 @@
           <a:lstStyle/>
           <a:p>
             <a:pPr algn="ctr"/>
+            <a:endParaRPr/>
           </a:p>
         </p:txBody>
       </p:sp>
@@ -4549,7 +4571,7 @@
           <a:noFill/>
         </p:spPr>
         <p:txBody>
-          <a:bodyPr wrap="square" anchor="t" lIns="25400" rIns="25400" tIns="12700" bIns="12700">
+          <a:bodyPr wrap="square" lIns="25400" tIns="12700" rIns="25400" bIns="12700" anchor="t">
             <a:spAutoFit/>
           </a:bodyPr>
           <a:lstStyle/>
@@ -4605,7 +4627,7 @@
           </a:fontRef>
         </p:style>
         <p:txBody>
-          <a:bodyPr rtlCol="0" anchor="ctr" wrap="square" lIns="38100" rIns="38100" tIns="0" bIns="0"/>
+          <a:bodyPr wrap="square" lIns="38100" tIns="0" rIns="38100" bIns="0" rtlCol="0" anchor="ctr"/>
           <a:lstStyle/>
           <a:p>
             <a:pPr algn="ctr"/>
@@ -4659,7 +4681,7 @@
           </a:fontRef>
         </p:style>
         <p:txBody>
-          <a:bodyPr rtlCol="0" anchor="ctr" wrap="square" lIns="38100" rIns="38100" tIns="0" bIns="0"/>
+          <a:bodyPr wrap="square" lIns="38100" tIns="0" rIns="38100" bIns="0" rtlCol="0" anchor="ctr"/>
           <a:lstStyle/>
           <a:p>
             <a:pPr algn="ctr"/>
@@ -4713,7 +4735,7 @@
           </a:fontRef>
         </p:style>
         <p:txBody>
-          <a:bodyPr rtlCol="0" anchor="ctr" wrap="square" lIns="38100" rIns="38100" tIns="0" bIns="0"/>
+          <a:bodyPr wrap="square" lIns="38100" tIns="0" rIns="38100" bIns="0" rtlCol="0" anchor="ctr"/>
           <a:lstStyle/>
           <a:p>
             <a:pPr algn="ctr"/>
@@ -4747,7 +4769,7 @@
           <a:noFill/>
         </p:spPr>
         <p:txBody>
-          <a:bodyPr wrap="square" anchor="t" lIns="25400" rIns="25400" tIns="12700" bIns="12700">
+          <a:bodyPr wrap="square" lIns="25400" tIns="12700" rIns="25400" bIns="12700" anchor="t">
             <a:spAutoFit/>
           </a:bodyPr>
           <a:lstStyle/>
@@ -4783,14 +4805,14 @@
           <a:noFill/>
         </p:spPr>
         <p:txBody>
-          <a:bodyPr wrap="square" anchor="t" lIns="25400" rIns="25400" tIns="12700" bIns="12700">
+          <a:bodyPr wrap="square" lIns="25400" tIns="12700" rIns="25400" bIns="12700" anchor="t">
             <a:spAutoFit/>
           </a:bodyPr>
           <a:lstStyle/>
           <a:p>
             <a:pPr algn="l"/>
             <a:r>
-              <a:rPr sz="1200" b="0">
+              <a:rPr sz="1200" b="0" dirty="0">
                 <a:solidFill>
                   <a:srgbClr val="8A8F9A"/>
                 </a:solidFill>
@@ -4845,6 +4867,7 @@
           <a:lstStyle/>
           <a:p>
             <a:pPr algn="ctr"/>
+            <a:endParaRPr/>
           </a:p>
         </p:txBody>
       </p:sp>
@@ -4885,7 +4908,7 @@
           </a:fontRef>
         </p:style>
         <p:txBody>
-          <a:bodyPr rtlCol="0" anchor="ctr" wrap="square" lIns="38100" rIns="38100" tIns="0" bIns="0"/>
+          <a:bodyPr wrap="square" lIns="38100" tIns="0" rIns="38100" bIns="0" rtlCol="0" anchor="ctr"/>
           <a:lstStyle/>
           <a:p>
             <a:pPr algn="ctr"/>
@@ -4919,7 +4942,7 @@
           <a:noFill/>
         </p:spPr>
         <p:txBody>
-          <a:bodyPr wrap="square" anchor="t" lIns="25400" rIns="25400" tIns="12700" bIns="12700">
+          <a:bodyPr wrap="square" lIns="25400" tIns="12700" rIns="25400" bIns="12700" anchor="t">
             <a:spAutoFit/>
           </a:bodyPr>
           <a:lstStyle/>
@@ -4955,7 +4978,7 @@
           <a:noFill/>
         </p:spPr>
         <p:txBody>
-          <a:bodyPr wrap="square" anchor="t" lIns="25400" rIns="25400" tIns="12700" bIns="12700">
+          <a:bodyPr wrap="square" lIns="25400" tIns="12700" rIns="25400" bIns="12700" anchor="t">
             <a:spAutoFit/>
           </a:bodyPr>
           <a:lstStyle/>
@@ -5021,6 +5044,7 @@
           <a:lstStyle/>
           <a:p>
             <a:pPr algn="ctr"/>
+            <a:endParaRPr/>
           </a:p>
         </p:txBody>
       </p:sp>
@@ -5061,7 +5085,7 @@
           </a:fontRef>
         </p:style>
         <p:txBody>
-          <a:bodyPr rtlCol="0" anchor="ctr" wrap="square" lIns="38100" rIns="38100" tIns="0" bIns="0"/>
+          <a:bodyPr wrap="square" lIns="38100" tIns="0" rIns="38100" bIns="0" rtlCol="0" anchor="ctr"/>
           <a:lstStyle/>
           <a:p>
             <a:pPr algn="ctr"/>
@@ -5095,7 +5119,7 @@
           <a:noFill/>
         </p:spPr>
         <p:txBody>
-          <a:bodyPr wrap="square" anchor="t" lIns="25400" rIns="25400" tIns="12700" bIns="12700">
+          <a:bodyPr wrap="square" lIns="25400" tIns="12700" rIns="25400" bIns="12700" anchor="t">
             <a:spAutoFit/>
           </a:bodyPr>
           <a:lstStyle/>
@@ -5131,7 +5155,7 @@
           <a:noFill/>
         </p:spPr>
         <p:txBody>
-          <a:bodyPr wrap="square" anchor="t" lIns="25400" rIns="25400" tIns="12700" bIns="12700">
+          <a:bodyPr wrap="square" lIns="25400" tIns="12700" rIns="25400" bIns="12700" anchor="t">
             <a:spAutoFit/>
           </a:bodyPr>
           <a:lstStyle/>
@@ -5197,6 +5221,7 @@
           <a:lstStyle/>
           <a:p>
             <a:pPr algn="ctr"/>
+            <a:endParaRPr/>
           </a:p>
         </p:txBody>
       </p:sp>
@@ -5237,7 +5262,7 @@
           </a:fontRef>
         </p:style>
         <p:txBody>
-          <a:bodyPr rtlCol="0" anchor="ctr" wrap="square" lIns="38100" rIns="38100" tIns="0" bIns="0"/>
+          <a:bodyPr wrap="square" lIns="38100" tIns="0" rIns="38100" bIns="0" rtlCol="0" anchor="ctr"/>
           <a:lstStyle/>
           <a:p>
             <a:pPr algn="ctr"/>
@@ -5271,7 +5296,7 @@
           <a:noFill/>
         </p:spPr>
         <p:txBody>
-          <a:bodyPr wrap="square" anchor="t" lIns="25400" rIns="25400" tIns="12700" bIns="12700">
+          <a:bodyPr wrap="square" lIns="25400" tIns="12700" rIns="25400" bIns="12700" anchor="t">
             <a:spAutoFit/>
           </a:bodyPr>
           <a:lstStyle/>
@@ -5307,7 +5332,7 @@
           <a:noFill/>
         </p:spPr>
         <p:txBody>
-          <a:bodyPr wrap="square" anchor="t" lIns="25400" rIns="25400" tIns="12700" bIns="12700">
+          <a:bodyPr wrap="square" lIns="25400" tIns="12700" rIns="25400" bIns="12700" anchor="t">
             <a:spAutoFit/>
           </a:bodyPr>
           <a:lstStyle/>
@@ -5373,6 +5398,7 @@
           <a:lstStyle/>
           <a:p>
             <a:pPr algn="ctr"/>
+            <a:endParaRPr dirty="0"/>
           </a:p>
         </p:txBody>
       </p:sp>
@@ -5417,6 +5443,7 @@
           <a:lstStyle/>
           <a:p>
             <a:pPr algn="ctr"/>
+            <a:endParaRPr/>
           </a:p>
         </p:txBody>
       </p:sp>
@@ -5437,14 +5464,14 @@
           <a:noFill/>
         </p:spPr>
         <p:txBody>
-          <a:bodyPr wrap="square" anchor="t" lIns="25400" rIns="25400" tIns="12700" bIns="12700">
+          <a:bodyPr wrap="square" lIns="25400" tIns="12700" rIns="25400" bIns="12700" anchor="t">
             <a:spAutoFit/>
           </a:bodyPr>
           <a:lstStyle/>
           <a:p>
             <a:pPr algn="l"/>
             <a:r>
-              <a:rPr sz="1300" b="1">
+              <a:rPr sz="1300" b="1" dirty="0" err="1">
                 <a:solidFill>
                   <a:srgbClr val="222838"/>
                 </a:solidFill>
@@ -5453,6 +5480,13 @@
               </a:rPr>
               <a:t>購入をお願いしたい品目</a:t>
             </a:r>
+            <a:endParaRPr sz="1300" b="1" dirty="0">
+              <a:solidFill>
+                <a:srgbClr val="222838"/>
+              </a:solidFill>
+              <a:latin typeface="Meiryo"/>
+              <a:ea typeface="メイリオ"/>
+            </a:endParaRPr>
           </a:p>
         </p:txBody>
       </p:sp>
@@ -5497,6 +5531,7 @@
           <a:lstStyle/>
           <a:p>
             <a:pPr algn="ctr"/>
+            <a:endParaRPr/>
           </a:p>
         </p:txBody>
       </p:sp>
@@ -5517,14 +5552,14 @@
           <a:noFill/>
         </p:spPr>
         <p:txBody>
-          <a:bodyPr wrap="square" anchor="t" lIns="25400" rIns="25400" tIns="12700" bIns="12700">
+          <a:bodyPr wrap="square" lIns="25400" tIns="12700" rIns="25400" bIns="12700" anchor="t">
             <a:spAutoFit/>
           </a:bodyPr>
           <a:lstStyle/>
           <a:p>
             <a:pPr algn="l"/>
             <a:r>
-              <a:rPr sz="1050" b="0">
+              <a:rPr sz="1050" b="0" dirty="0">
                 <a:solidFill>
                   <a:srgbClr val="222838"/>
                 </a:solidFill>
@@ -5553,7 +5588,7 @@
           <a:noFill/>
         </p:spPr>
         <p:txBody>
-          <a:bodyPr wrap="square" anchor="t" lIns="25400" rIns="25400" tIns="12700" bIns="12700">
+          <a:bodyPr wrap="square" lIns="25400" tIns="12700" rIns="25400" bIns="12700" anchor="t">
             <a:spAutoFit/>
           </a:bodyPr>
           <a:lstStyle/>
@@ -5589,7 +5624,7 @@
           <a:noFill/>
         </p:spPr>
         <p:txBody>
-          <a:bodyPr wrap="square" anchor="t" lIns="25400" rIns="25400" tIns="12700" bIns="12700">
+          <a:bodyPr wrap="square" lIns="25400" tIns="12700" rIns="25400" bIns="12700" anchor="t">
             <a:spAutoFit/>
           </a:bodyPr>
           <a:lstStyle/>
@@ -5629,22 +5664,59 @@
           <a:noFill/>
         </p:spPr>
         <p:txBody>
-          <a:bodyPr wrap="square" anchor="t" lIns="25400" rIns="25400" tIns="12700" bIns="12700">
+          <a:bodyPr wrap="square" lIns="25400" tIns="12700" rIns="25400" bIns="12700" anchor="t">
             <a:spAutoFit/>
           </a:bodyPr>
           <a:lstStyle/>
           <a:p>
             <a:pPr algn="l"/>
             <a:r>
-              <a:rPr sz="1050" b="0">
+              <a:rPr sz="1050" b="0" dirty="0" err="1">
                 <a:solidFill>
                   <a:srgbClr val="222838"/>
                 </a:solidFill>
                 <a:latin typeface="Meiryo"/>
                 <a:ea typeface="メイリオ"/>
               </a:rPr>
-              <a:t>騒音計（平均音量が出るもの）</a:t>
-            </a:r>
+              <a:t>騒音計</a:t>
+            </a:r>
+            <a:r>
+              <a:rPr lang="ja-JP" altLang="en-US" sz="1050" b="0" dirty="0">
+                <a:solidFill>
+                  <a:srgbClr val="222838"/>
+                </a:solidFill>
+                <a:latin typeface="Meiryo"/>
+                <a:ea typeface="メイリオ"/>
+              </a:rPr>
+              <a:t>（</a:t>
+            </a:r>
+            <a:r>
+              <a:rPr sz="1050" b="0" dirty="0" err="1">
+                <a:solidFill>
+                  <a:srgbClr val="222838"/>
+                </a:solidFill>
+                <a:latin typeface="Meiryo"/>
+                <a:ea typeface="メイリオ"/>
+              </a:rPr>
+              <a:t>平均音量が出るもの</a:t>
+            </a:r>
+            <a:r>
+              <a:rPr lang="ja-JP" altLang="en-US" sz="1050" b="0" dirty="0">
+                <a:solidFill>
+                  <a:srgbClr val="222838"/>
+                </a:solidFill>
+                <a:latin typeface="Meiryo"/>
+                <a:ea typeface="メイリオ"/>
+              </a:rPr>
+              <a:t>）</a:t>
+            </a:r>
+            <a:endParaRPr sz="1050" b="0" dirty="0">
+              <a:solidFill>
+                <a:srgbClr val="222838"/>
+              </a:solidFill>
+              <a:latin typeface="Meiryo"/>
+              <a:ea typeface="メイリオ"/>
+            </a:endParaRPr>
           </a:p>
         </p:txBody>
       </p:sp>
@@ -5665,7 +5737,7 @@
           <a:noFill/>
         </p:spPr>
         <p:txBody>
-          <a:bodyPr wrap="square" anchor="t" lIns="25400" rIns="25400" tIns="12700" bIns="12700">
+          <a:bodyPr wrap="square" lIns="25400" tIns="12700" rIns="25400" bIns="12700" anchor="t">
             <a:spAutoFit/>
           </a:bodyPr>
           <a:lstStyle/>
@@ -5701,7 +5773,7 @@
           <a:noFill/>
         </p:spPr>
         <p:txBody>
-          <a:bodyPr wrap="square" anchor="t" lIns="25400" rIns="25400" tIns="12700" bIns="12700">
+          <a:bodyPr wrap="square" lIns="25400" tIns="12700" rIns="25400" bIns="12700" anchor="t">
             <a:spAutoFit/>
           </a:bodyPr>
           <a:lstStyle/>
@@ -5741,7 +5813,7 @@
           <a:noFill/>
         </p:spPr>
         <p:txBody>
-          <a:bodyPr wrap="square" anchor="t" lIns="25400" rIns="25400" tIns="12700" bIns="12700">
+          <a:bodyPr wrap="square" lIns="25400" tIns="12700" rIns="25400" bIns="12700" anchor="t">
             <a:spAutoFit/>
           </a:bodyPr>
           <a:lstStyle/>
@@ -5777,7 +5849,7 @@
           <a:noFill/>
         </p:spPr>
         <p:txBody>
-          <a:bodyPr wrap="square" anchor="t" lIns="25400" rIns="25400" tIns="12700" bIns="12700">
+          <a:bodyPr wrap="square" lIns="25400" tIns="12700" rIns="25400" bIns="12700" anchor="t">
             <a:spAutoFit/>
           </a:bodyPr>
           <a:lstStyle/>
@@ -5813,7 +5885,7 @@
           <a:noFill/>
         </p:spPr>
         <p:txBody>
-          <a:bodyPr wrap="square" anchor="t" lIns="25400" rIns="25400" tIns="12700" bIns="12700">
+          <a:bodyPr wrap="square" lIns="25400" tIns="12700" rIns="25400" bIns="12700" anchor="t">
             <a:spAutoFit/>
           </a:bodyPr>
           <a:lstStyle/>
@@ -5877,6 +5949,7 @@
           <a:lstStyle/>
           <a:p>
             <a:pPr algn="ctr"/>
+            <a:endParaRPr/>
           </a:p>
         </p:txBody>
       </p:sp>
@@ -5897,7 +5970,7 @@
           <a:noFill/>
         </p:spPr>
         <p:txBody>
-          <a:bodyPr wrap="square" anchor="t" lIns="25400" rIns="25400" tIns="12700" bIns="12700">
+          <a:bodyPr wrap="square" lIns="25400" tIns="12700" rIns="25400" bIns="12700" anchor="t">
             <a:spAutoFit/>
           </a:bodyPr>
           <a:lstStyle/>
@@ -5933,7 +6006,7 @@
           <a:noFill/>
         </p:spPr>
         <p:txBody>
-          <a:bodyPr wrap="square" anchor="t" lIns="25400" rIns="25400" tIns="12700" bIns="12700">
+          <a:bodyPr wrap="square" lIns="25400" tIns="12700" rIns="25400" bIns="12700" anchor="t">
             <a:spAutoFit/>
           </a:bodyPr>
           <a:lstStyle/>
@@ -5993,6 +6066,7 @@
           <a:lstStyle/>
           <a:p>
             <a:pPr algn="ctr"/>
+            <a:endParaRPr/>
           </a:p>
         </p:txBody>
       </p:sp>
@@ -6037,6 +6111,7 @@
           <a:lstStyle/>
           <a:p>
             <a:pPr algn="ctr"/>
+            <a:endParaRPr/>
           </a:p>
         </p:txBody>
       </p:sp>
@@ -6057,7 +6132,7 @@
           <a:noFill/>
         </p:spPr>
         <p:txBody>
-          <a:bodyPr wrap="square" anchor="t" lIns="25400" rIns="25400" tIns="12700" bIns="12700">
+          <a:bodyPr wrap="square" lIns="25400" tIns="12700" rIns="25400" bIns="12700" anchor="t">
             <a:spAutoFit/>
           </a:bodyPr>
           <a:lstStyle/>
@@ -6106,7 +6181,7 @@
 </file>
 
 <file path=ppt/slides/slide2.xml><?xml version="1.0" encoding="utf-8"?>
-<p:sld xmlns:a="http://schemas.openxmlformats.org/drawingml/2006/main" xmlns:p="http://schemas.openxmlformats.org/presentationml/2006/main" xmlns:r="http://schemas.openxmlformats.org/officeDocument/2006/relationships">
+<p:sld xmlns:a="http://schemas.openxmlformats.org/drawingml/2006/main" xmlns:r="http://schemas.openxmlformats.org/officeDocument/2006/relationships" xmlns:p="http://schemas.openxmlformats.org/presentationml/2006/main">
   <p:cSld>
     <p:spTree>
       <p:nvGrpSpPr>
@@ -6114,7 +6189,14 @@
         <p:cNvGrpSpPr/>
         <p:nvPr/>
       </p:nvGrpSpPr>
-      <p:grpSpPr/>
+      <p:grpSpPr>
+        <a:xfrm>
+          <a:off x="0" y="0"/>
+          <a:ext cx="0" cy="0"/>
+          <a:chOff x="0" y="0"/>
+          <a:chExt cx="0" cy="0"/>
+        </a:xfrm>
+      </p:grpSpPr>
       <p:sp>
         <p:nvSpPr>
           <p:cNvPr id="2" name="Rectangle 1"/>
@@ -6156,6 +6238,7 @@
           <a:lstStyle/>
           <a:p>
             <a:pPr algn="ctr"/>
+            <a:endParaRPr/>
           </a:p>
         </p:txBody>
       </p:sp>
@@ -6200,6 +6283,7 @@
           <a:lstStyle/>
           <a:p>
             <a:pPr algn="ctr"/>
+            <a:endParaRPr/>
           </a:p>
         </p:txBody>
       </p:sp>
@@ -6220,7 +6304,7 @@
           <a:noFill/>
         </p:spPr>
         <p:txBody>
-          <a:bodyPr wrap="square" anchor="t" lIns="25400" rIns="25400" tIns="12700" bIns="12700">
+          <a:bodyPr wrap="square" lIns="25400" tIns="12700" rIns="25400" bIns="12700" anchor="t">
             <a:spAutoFit/>
           </a:bodyPr>
           <a:lstStyle/>
@@ -6280,6 +6364,7 @@
           <a:lstStyle/>
           <a:p>
             <a:pPr algn="ctr"/>
+            <a:endParaRPr/>
           </a:p>
         </p:txBody>
       </p:sp>
@@ -6300,7 +6385,7 @@
           <a:noFill/>
         </p:spPr>
         <p:txBody>
-          <a:bodyPr wrap="square" anchor="t" lIns="25400" rIns="25400" tIns="12700" bIns="12700">
+          <a:bodyPr wrap="square" lIns="25400" tIns="12700" rIns="25400" bIns="12700" anchor="t">
             <a:spAutoFit/>
           </a:bodyPr>
           <a:lstStyle/>
@@ -6356,7 +6441,7 @@
           </a:fontRef>
         </p:style>
         <p:txBody>
-          <a:bodyPr rtlCol="0" anchor="ctr" wrap="square" lIns="38100" rIns="38100" tIns="0" bIns="0"/>
+          <a:bodyPr wrap="square" lIns="38100" tIns="0" rIns="38100" bIns="0" rtlCol="0" anchor="ctr"/>
           <a:lstStyle/>
           <a:p>
             <a:pPr algn="ctr"/>
@@ -6410,7 +6495,7 @@
           </a:fontRef>
         </p:style>
         <p:txBody>
-          <a:bodyPr rtlCol="0" anchor="ctr" wrap="square" lIns="38100" rIns="38100" tIns="0" bIns="0"/>
+          <a:bodyPr wrap="square" lIns="38100" tIns="0" rIns="38100" bIns="0" rtlCol="0" anchor="ctr"/>
           <a:lstStyle/>
           <a:p>
             <a:pPr algn="ctr"/>
@@ -6464,7 +6549,7 @@
           </a:fontRef>
         </p:style>
         <p:txBody>
-          <a:bodyPr rtlCol="0" anchor="ctr" wrap="square" lIns="38100" rIns="38100" tIns="0" bIns="0"/>
+          <a:bodyPr wrap="square" lIns="38100" tIns="0" rIns="38100" bIns="0" rtlCol="0" anchor="ctr"/>
           <a:lstStyle/>
           <a:p>
             <a:pPr algn="ctr"/>
@@ -6498,7 +6583,7 @@
           <a:noFill/>
         </p:spPr>
         <p:txBody>
-          <a:bodyPr wrap="square" anchor="t" lIns="25400" rIns="25400" tIns="12700" bIns="12700">
+          <a:bodyPr wrap="square" lIns="25400" tIns="12700" rIns="25400" bIns="12700" anchor="t">
             <a:spAutoFit/>
           </a:bodyPr>
           <a:lstStyle/>
@@ -6534,7 +6619,7 @@
           <a:noFill/>
         </p:spPr>
         <p:txBody>
-          <a:bodyPr wrap="square" anchor="t" lIns="25400" rIns="25400" tIns="12700" bIns="12700">
+          <a:bodyPr wrap="square" lIns="25400" tIns="12700" rIns="25400" bIns="12700" anchor="t">
             <a:spAutoFit/>
           </a:bodyPr>
           <a:lstStyle/>
@@ -6594,6 +6679,7 @@
           <a:lstStyle/>
           <a:p>
             <a:pPr algn="ctr"/>
+            <a:endParaRPr/>
           </a:p>
         </p:txBody>
       </p:sp>
@@ -6614,7 +6700,7 @@
           <a:noFill/>
         </p:spPr>
         <p:txBody>
-          <a:bodyPr wrap="square" anchor="t" lIns="25400" rIns="25400" tIns="12700" bIns="12700">
+          <a:bodyPr wrap="square" lIns="25400" tIns="12700" rIns="25400" bIns="12700" anchor="t">
             <a:spAutoFit/>
           </a:bodyPr>
           <a:lstStyle/>
@@ -6650,7 +6736,7 @@
           <a:noFill/>
         </p:spPr>
         <p:txBody>
-          <a:bodyPr wrap="square" anchor="t" lIns="25400" rIns="25400" tIns="12700" bIns="12700">
+          <a:bodyPr wrap="square" lIns="25400" tIns="12700" rIns="25400" bIns="12700" anchor="t">
             <a:spAutoFit/>
           </a:bodyPr>
           <a:lstStyle/>
@@ -6686,7 +6772,7 @@
           <a:noFill/>
         </p:spPr>
         <p:txBody>
-          <a:bodyPr wrap="square" anchor="t" lIns="25400" rIns="25400" tIns="12700" bIns="12700">
+          <a:bodyPr wrap="square" lIns="25400" tIns="12700" rIns="25400" bIns="12700" anchor="t">
             <a:spAutoFit/>
           </a:bodyPr>
           <a:lstStyle/>
@@ -6748,6 +6834,7 @@
           <a:lstStyle/>
           <a:p>
             <a:pPr algn="ctr"/>
+            <a:endParaRPr/>
           </a:p>
         </p:txBody>
       </p:sp>
@@ -6768,7 +6855,7 @@
           <a:noFill/>
         </p:spPr>
         <p:txBody>
-          <a:bodyPr wrap="square" anchor="t" lIns="25400" rIns="25400" tIns="12700" bIns="12700">
+          <a:bodyPr wrap="square" lIns="25400" tIns="12700" rIns="25400" bIns="12700" anchor="t">
             <a:spAutoFit/>
           </a:bodyPr>
           <a:lstStyle/>
@@ -6804,7 +6891,7 @@
           <a:noFill/>
         </p:spPr>
         <p:txBody>
-          <a:bodyPr wrap="square" anchor="t" lIns="25400" rIns="25400" tIns="12700" bIns="12700">
+          <a:bodyPr wrap="square" lIns="25400" tIns="12700" rIns="25400" bIns="12700" anchor="t">
             <a:spAutoFit/>
           </a:bodyPr>
           <a:lstStyle/>
@@ -6860,7 +6947,7 @@
           </a:fontRef>
         </p:style>
         <p:txBody>
-          <a:bodyPr rtlCol="0" anchor="ctr" wrap="square" lIns="38100" rIns="38100" tIns="0" bIns="0"/>
+          <a:bodyPr wrap="square" lIns="38100" tIns="0" rIns="38100" bIns="0" rtlCol="0" anchor="ctr"/>
           <a:lstStyle/>
           <a:p>
             <a:pPr algn="ctr"/>
@@ -6920,6 +7007,7 @@
           <a:lstStyle/>
           <a:p>
             <a:pPr algn="ctr"/>
+            <a:endParaRPr/>
           </a:p>
         </p:txBody>
       </p:sp>
@@ -6940,7 +7028,7 @@
           <a:noFill/>
         </p:spPr>
         <p:txBody>
-          <a:bodyPr wrap="square" anchor="t" lIns="25400" rIns="25400" tIns="12700" bIns="12700">
+          <a:bodyPr wrap="square" lIns="25400" tIns="12700" rIns="25400" bIns="12700" anchor="t">
             <a:spAutoFit/>
           </a:bodyPr>
           <a:lstStyle/>
@@ -6976,7 +7064,7 @@
           <a:noFill/>
         </p:spPr>
         <p:txBody>
-          <a:bodyPr wrap="square" anchor="t" lIns="25400" rIns="25400" tIns="12700" bIns="12700">
+          <a:bodyPr wrap="square" lIns="25400" tIns="12700" rIns="25400" bIns="12700" anchor="t">
             <a:spAutoFit/>
           </a:bodyPr>
           <a:lstStyle/>
@@ -7032,7 +7120,7 @@
           </a:fontRef>
         </p:style>
         <p:txBody>
-          <a:bodyPr rtlCol="0" anchor="ctr" wrap="square" lIns="38100" rIns="38100" tIns="0" bIns="0"/>
+          <a:bodyPr wrap="square" lIns="38100" tIns="0" rIns="38100" bIns="0" rtlCol="0" anchor="ctr"/>
           <a:lstStyle/>
           <a:p>
             <a:pPr algn="ctr"/>
@@ -7092,6 +7180,7 @@
           <a:lstStyle/>
           <a:p>
             <a:pPr algn="ctr"/>
+            <a:endParaRPr/>
           </a:p>
         </p:txBody>
       </p:sp>
@@ -7112,7 +7201,7 @@
           <a:noFill/>
         </p:spPr>
         <p:txBody>
-          <a:bodyPr wrap="square" anchor="t" lIns="25400" rIns="25400" tIns="12700" bIns="12700">
+          <a:bodyPr wrap="square" lIns="25400" tIns="12700" rIns="25400" bIns="12700" anchor="t">
             <a:spAutoFit/>
           </a:bodyPr>
           <a:lstStyle/>
@@ -7148,7 +7237,7 @@
           <a:noFill/>
         </p:spPr>
         <p:txBody>
-          <a:bodyPr wrap="square" anchor="t" lIns="25400" rIns="25400" tIns="12700" bIns="12700">
+          <a:bodyPr wrap="square" lIns="25400" tIns="12700" rIns="25400" bIns="12700" anchor="t">
             <a:spAutoFit/>
           </a:bodyPr>
           <a:lstStyle/>
@@ -7204,7 +7293,7 @@
           </a:fontRef>
         </p:style>
         <p:txBody>
-          <a:bodyPr rtlCol="0" anchor="ctr" wrap="square" lIns="38100" rIns="38100" tIns="0" bIns="0"/>
+          <a:bodyPr wrap="square" lIns="38100" tIns="0" rIns="38100" bIns="0" rtlCol="0" anchor="ctr"/>
           <a:lstStyle/>
           <a:p>
             <a:pPr algn="ctr"/>
@@ -7264,6 +7353,7 @@
           <a:lstStyle/>
           <a:p>
             <a:pPr algn="ctr"/>
+            <a:endParaRPr/>
           </a:p>
         </p:txBody>
       </p:sp>
@@ -7284,7 +7374,7 @@
           <a:noFill/>
         </p:spPr>
         <p:txBody>
-          <a:bodyPr wrap="square" anchor="t" lIns="25400" rIns="25400" tIns="12700" bIns="12700">
+          <a:bodyPr wrap="square" lIns="25400" tIns="12700" rIns="25400" bIns="12700" anchor="t">
             <a:spAutoFit/>
           </a:bodyPr>
           <a:lstStyle/>
@@ -7320,7 +7410,7 @@
           <a:noFill/>
         </p:spPr>
         <p:txBody>
-          <a:bodyPr wrap="square" anchor="t" lIns="25400" rIns="25400" tIns="12700" bIns="12700">
+          <a:bodyPr wrap="square" lIns="25400" tIns="12700" rIns="25400" bIns="12700" anchor="t">
             <a:spAutoFit/>
           </a:bodyPr>
           <a:lstStyle/>
@@ -7376,7 +7466,7 @@
           </a:fontRef>
         </p:style>
         <p:txBody>
-          <a:bodyPr rtlCol="0" anchor="ctr" wrap="square" lIns="38100" rIns="38100" tIns="0" bIns="0"/>
+          <a:bodyPr wrap="square" lIns="38100" tIns="0" rIns="38100" bIns="0" rtlCol="0" anchor="ctr"/>
           <a:lstStyle/>
           <a:p>
             <a:pPr algn="ctr"/>
@@ -7436,6 +7526,7 @@
           <a:lstStyle/>
           <a:p>
             <a:pPr algn="ctr"/>
+            <a:endParaRPr/>
           </a:p>
         </p:txBody>
       </p:sp>
@@ -7456,7 +7547,7 @@
           <a:noFill/>
         </p:spPr>
         <p:txBody>
-          <a:bodyPr wrap="square" anchor="t" lIns="25400" rIns="25400" tIns="12700" bIns="12700">
+          <a:bodyPr wrap="square" lIns="25400" tIns="12700" rIns="25400" bIns="12700" anchor="t">
             <a:spAutoFit/>
           </a:bodyPr>
           <a:lstStyle/>
@@ -7492,7 +7583,7 @@
           <a:noFill/>
         </p:spPr>
         <p:txBody>
-          <a:bodyPr wrap="square" anchor="t" lIns="25400" rIns="25400" tIns="12700" bIns="12700">
+          <a:bodyPr wrap="square" lIns="25400" tIns="12700" rIns="25400" bIns="12700" anchor="t">
             <a:spAutoFit/>
           </a:bodyPr>
           <a:lstStyle/>
@@ -7548,7 +7639,7 @@
           </a:fontRef>
         </p:style>
         <p:txBody>
-          <a:bodyPr rtlCol="0" anchor="ctr" wrap="square" lIns="38100" rIns="38100" tIns="0" bIns="0"/>
+          <a:bodyPr wrap="square" lIns="38100" tIns="0" rIns="38100" bIns="0" rtlCol="0" anchor="ctr"/>
           <a:lstStyle/>
           <a:p>
             <a:pPr algn="ctr"/>
@@ -7608,6 +7699,7 @@
           <a:lstStyle/>
           <a:p>
             <a:pPr algn="ctr"/>
+            <a:endParaRPr/>
           </a:p>
         </p:txBody>
       </p:sp>
@@ -7628,7 +7720,7 @@
           <a:noFill/>
         </p:spPr>
         <p:txBody>
-          <a:bodyPr wrap="square" anchor="t" lIns="25400" rIns="25400" tIns="12700" bIns="12700">
+          <a:bodyPr wrap="square" lIns="25400" tIns="12700" rIns="25400" bIns="12700" anchor="t">
             <a:spAutoFit/>
           </a:bodyPr>
           <a:lstStyle/>
@@ -7664,7 +7756,7 @@
           <a:noFill/>
         </p:spPr>
         <p:txBody>
-          <a:bodyPr wrap="square" anchor="t" lIns="25400" rIns="25400" tIns="12700" bIns="12700">
+          <a:bodyPr wrap="square" lIns="25400" tIns="12700" rIns="25400" bIns="12700" anchor="t">
             <a:spAutoFit/>
           </a:bodyPr>
           <a:lstStyle/>
@@ -7720,7 +7812,7 @@
           </a:fontRef>
         </p:style>
         <p:txBody>
-          <a:bodyPr rtlCol="0" anchor="ctr" wrap="square" lIns="38100" rIns="38100" tIns="0" bIns="0"/>
+          <a:bodyPr wrap="square" lIns="38100" tIns="0" rIns="38100" bIns="0" rtlCol="0" anchor="ctr"/>
           <a:lstStyle/>
           <a:p>
             <a:pPr algn="ctr"/>
@@ -7780,6 +7872,7 @@
           <a:lstStyle/>
           <a:p>
             <a:pPr algn="ctr"/>
+            <a:endParaRPr/>
           </a:p>
         </p:txBody>
       </p:sp>
@@ -7800,7 +7893,7 @@
           <a:noFill/>
         </p:spPr>
         <p:txBody>
-          <a:bodyPr wrap="square" anchor="t" lIns="25400" rIns="25400" tIns="12700" bIns="12700">
+          <a:bodyPr wrap="square" lIns="25400" tIns="12700" rIns="25400" bIns="12700" anchor="t">
             <a:spAutoFit/>
           </a:bodyPr>
           <a:lstStyle/>
@@ -7836,7 +7929,7 @@
           <a:noFill/>
         </p:spPr>
         <p:txBody>
-          <a:bodyPr wrap="square" anchor="t" lIns="25400" rIns="25400" tIns="12700" bIns="12700">
+          <a:bodyPr wrap="square" lIns="25400" tIns="12700" rIns="25400" bIns="12700" anchor="t">
             <a:spAutoFit/>
           </a:bodyPr>
           <a:lstStyle/>
@@ -7892,7 +7985,7 @@
           </a:fontRef>
         </p:style>
         <p:txBody>
-          <a:bodyPr rtlCol="0" anchor="ctr" wrap="square" lIns="38100" rIns="38100" tIns="0" bIns="0"/>
+          <a:bodyPr wrap="square" lIns="38100" tIns="0" rIns="38100" bIns="0" rtlCol="0" anchor="ctr"/>
           <a:lstStyle/>
           <a:p>
             <a:pPr algn="ctr"/>
@@ -7952,6 +8045,7 @@
           <a:lstStyle/>
           <a:p>
             <a:pPr algn="ctr"/>
+            <a:endParaRPr/>
           </a:p>
         </p:txBody>
       </p:sp>
@@ -7972,7 +8066,7 @@
           <a:noFill/>
         </p:spPr>
         <p:txBody>
-          <a:bodyPr wrap="square" anchor="t" lIns="25400" rIns="25400" tIns="12700" bIns="12700">
+          <a:bodyPr wrap="square" lIns="25400" tIns="12700" rIns="25400" bIns="12700" anchor="t">
             <a:spAutoFit/>
           </a:bodyPr>
           <a:lstStyle/>
@@ -8008,7 +8102,7 @@
           <a:noFill/>
         </p:spPr>
         <p:txBody>
-          <a:bodyPr wrap="square" anchor="t" lIns="25400" rIns="25400" tIns="12700" bIns="12700">
+          <a:bodyPr wrap="square" lIns="25400" tIns="12700" rIns="25400" bIns="12700" anchor="t">
             <a:spAutoFit/>
           </a:bodyPr>
           <a:lstStyle/>
@@ -8064,7 +8158,7 @@
           </a:fontRef>
         </p:style>
         <p:txBody>
-          <a:bodyPr rtlCol="0" anchor="ctr" wrap="square" lIns="38100" rIns="38100" tIns="0" bIns="0"/>
+          <a:bodyPr wrap="square" lIns="38100" tIns="0" rIns="38100" bIns="0" rtlCol="0" anchor="ctr"/>
           <a:lstStyle/>
           <a:p>
             <a:pPr algn="ctr"/>
@@ -8122,6 +8216,7 @@
           <a:lstStyle/>
           <a:p>
             <a:pPr algn="ctr"/>
+            <a:endParaRPr/>
           </a:p>
         </p:txBody>
       </p:sp>
@@ -8166,6 +8261,7 @@
           <a:lstStyle/>
           <a:p>
             <a:pPr algn="ctr"/>
+            <a:endParaRPr/>
           </a:p>
         </p:txBody>
       </p:sp>
@@ -8186,7 +8282,7 @@
           <a:noFill/>
         </p:spPr>
         <p:txBody>
-          <a:bodyPr wrap="square" anchor="t" lIns="25400" rIns="25400" tIns="12700" bIns="12700">
+          <a:bodyPr wrap="square" lIns="25400" tIns="12700" rIns="25400" bIns="12700" anchor="t">
             <a:spAutoFit/>
           </a:bodyPr>
           <a:lstStyle/>
@@ -8224,7 +8320,7 @@
 </file>
 
 <file path=ppt/slides/slide3.xml><?xml version="1.0" encoding="utf-8"?>
-<p:sld xmlns:a="http://schemas.openxmlformats.org/drawingml/2006/main" xmlns:p="http://schemas.openxmlformats.org/presentationml/2006/main" xmlns:r="http://schemas.openxmlformats.org/officeDocument/2006/relationships">
+<p:sld xmlns:a="http://schemas.openxmlformats.org/drawingml/2006/main" xmlns:r="http://schemas.openxmlformats.org/officeDocument/2006/relationships" xmlns:p="http://schemas.openxmlformats.org/presentationml/2006/main">
   <p:cSld>
     <p:spTree>
       <p:nvGrpSpPr>
@@ -8232,7 +8328,14 @@
         <p:cNvGrpSpPr/>
         <p:nvPr/>
       </p:nvGrpSpPr>
-      <p:grpSpPr/>
+      <p:grpSpPr>
+        <a:xfrm>
+          <a:off x="0" y="0"/>
+          <a:ext cx="0" cy="0"/>
+          <a:chOff x="0" y="0"/>
+          <a:chExt cx="0" cy="0"/>
+        </a:xfrm>
+      </p:grpSpPr>
       <p:sp>
         <p:nvSpPr>
           <p:cNvPr id="2" name="Rectangle 1"/>
@@ -8274,6 +8377,7 @@
           <a:lstStyle/>
           <a:p>
             <a:pPr algn="ctr"/>
+            <a:endParaRPr/>
           </a:p>
         </p:txBody>
       </p:sp>
@@ -8318,6 +8422,7 @@
           <a:lstStyle/>
           <a:p>
             <a:pPr algn="ctr"/>
+            <a:endParaRPr/>
           </a:p>
         </p:txBody>
       </p:sp>
@@ -8338,14 +8443,14 @@
           <a:noFill/>
         </p:spPr>
         <p:txBody>
-          <a:bodyPr wrap="square" anchor="t" lIns="25400" rIns="25400" tIns="12700" bIns="12700">
+          <a:bodyPr wrap="square" lIns="25400" tIns="12700" rIns="25400" bIns="12700" anchor="t">
             <a:spAutoFit/>
           </a:bodyPr>
           <a:lstStyle/>
           <a:p>
             <a:pPr algn="l"/>
             <a:r>
-              <a:rPr sz="2200" b="1" spc="250">
+              <a:rPr sz="2200" b="1" spc="250" dirty="0" err="1">
                 <a:solidFill>
                   <a:srgbClr val="222838"/>
                 </a:solidFill>
@@ -8354,6 +8459,13 @@
               </a:rPr>
               <a:t>約束したこと：すり抜けと対向を、どう区別するか</a:t>
             </a:r>
+            <a:endParaRPr sz="2200" b="1" spc="250" dirty="0">
+              <a:solidFill>
+                <a:srgbClr val="222838"/>
+              </a:solidFill>
+              <a:latin typeface="Meiryo"/>
+              <a:ea typeface="メイリオ"/>
+            </a:endParaRPr>
           </a:p>
         </p:txBody>
       </p:sp>
@@ -8398,6 +8510,7 @@
           <a:lstStyle/>
           <a:p>
             <a:pPr algn="ctr"/>
+            <a:endParaRPr/>
           </a:p>
         </p:txBody>
       </p:sp>
@@ -8418,7 +8531,7 @@
           <a:noFill/>
         </p:spPr>
         <p:txBody>
-          <a:bodyPr wrap="square" anchor="t" lIns="25400" rIns="25400" tIns="12700" bIns="12700">
+          <a:bodyPr wrap="square" lIns="25400" tIns="12700" rIns="25400" bIns="12700" anchor="t">
             <a:spAutoFit/>
           </a:bodyPr>
           <a:lstStyle/>
@@ -8474,7 +8587,7 @@
           </a:fontRef>
         </p:style>
         <p:txBody>
-          <a:bodyPr rtlCol="0" anchor="ctr" wrap="square" lIns="38100" rIns="38100" tIns="0" bIns="0"/>
+          <a:bodyPr wrap="square" lIns="38100" tIns="0" rIns="38100" bIns="0" rtlCol="0" anchor="ctr"/>
           <a:lstStyle/>
           <a:p>
             <a:pPr algn="ctr"/>
@@ -8528,7 +8641,7 @@
           </a:fontRef>
         </p:style>
         <p:txBody>
-          <a:bodyPr rtlCol="0" anchor="ctr" wrap="square" lIns="38100" rIns="38100" tIns="0" bIns="0"/>
+          <a:bodyPr wrap="square" lIns="38100" tIns="0" rIns="38100" bIns="0" rtlCol="0" anchor="ctr"/>
           <a:lstStyle/>
           <a:p>
             <a:pPr algn="ctr"/>
@@ -8582,7 +8695,7 @@
           </a:fontRef>
         </p:style>
         <p:txBody>
-          <a:bodyPr rtlCol="0" anchor="ctr" wrap="square" lIns="38100" rIns="38100" tIns="0" bIns="0"/>
+          <a:bodyPr wrap="square" lIns="38100" tIns="0" rIns="38100" bIns="0" rtlCol="0" anchor="ctr"/>
           <a:lstStyle/>
           <a:p>
             <a:pPr algn="ctr"/>
@@ -8616,7 +8729,7 @@
           <a:noFill/>
         </p:spPr>
         <p:txBody>
-          <a:bodyPr wrap="square" anchor="t" lIns="25400" rIns="25400" tIns="12700" bIns="12700">
+          <a:bodyPr wrap="square" lIns="25400" tIns="12700" rIns="25400" bIns="12700" anchor="t">
             <a:spAutoFit/>
           </a:bodyPr>
           <a:lstStyle/>
@@ -8652,7 +8765,7 @@
           <a:noFill/>
         </p:spPr>
         <p:txBody>
-          <a:bodyPr wrap="square" anchor="t" lIns="25400" rIns="25400" tIns="12700" bIns="12700">
+          <a:bodyPr wrap="square" lIns="25400" tIns="12700" rIns="25400" bIns="12700" anchor="t">
             <a:spAutoFit/>
           </a:bodyPr>
           <a:lstStyle/>
@@ -8714,6 +8827,7 @@
           <a:lstStyle/>
           <a:p>
             <a:pPr algn="ctr"/>
+            <a:endParaRPr/>
           </a:p>
         </p:txBody>
       </p:sp>
@@ -8734,7 +8848,7 @@
           <a:noFill/>
         </p:spPr>
         <p:txBody>
-          <a:bodyPr wrap="square" anchor="t" lIns="25400" rIns="25400" tIns="12700" bIns="12700">
+          <a:bodyPr wrap="square" lIns="25400" tIns="12700" rIns="25400" bIns="12700" anchor="t">
             <a:spAutoFit/>
           </a:bodyPr>
           <a:lstStyle/>
@@ -8794,6 +8908,7 @@
           <a:lstStyle/>
           <a:p>
             <a:pPr algn="ctr"/>
+            <a:endParaRPr/>
           </a:p>
         </p:txBody>
       </p:sp>
@@ -8814,7 +8929,7 @@
           <a:noFill/>
         </p:spPr>
         <p:txBody>
-          <a:bodyPr wrap="square" anchor="t" lIns="25400" rIns="25400" tIns="12700" bIns="12700">
+          <a:bodyPr wrap="square" lIns="25400" tIns="12700" rIns="25400" bIns="12700" anchor="t">
             <a:spAutoFit/>
           </a:bodyPr>
           <a:lstStyle/>
@@ -8874,6 +8989,7 @@
           <a:lstStyle/>
           <a:p>
             <a:pPr algn="ctr"/>
+            <a:endParaRPr/>
           </a:p>
         </p:txBody>
       </p:sp>
@@ -8918,6 +9034,7 @@
           <a:lstStyle/>
           <a:p>
             <a:pPr algn="ctr"/>
+            <a:endParaRPr/>
           </a:p>
         </p:txBody>
       </p:sp>
@@ -8938,7 +9055,7 @@
           <a:noFill/>
         </p:spPr>
         <p:txBody>
-          <a:bodyPr wrap="square" anchor="t" lIns="25400" rIns="25400" tIns="12700" bIns="12700">
+          <a:bodyPr wrap="square" lIns="25400" tIns="12700" rIns="25400" bIns="12700" anchor="t">
             <a:spAutoFit/>
           </a:bodyPr>
           <a:lstStyle/>
@@ -9019,6 +9136,7 @@
           <a:lstStyle/>
           <a:p>
             <a:pPr algn="ctr"/>
+            <a:endParaRPr/>
           </a:p>
         </p:txBody>
       </p:sp>
@@ -9063,6 +9181,7 @@
           <a:lstStyle/>
           <a:p>
             <a:pPr algn="ctr"/>
+            <a:endParaRPr/>
           </a:p>
         </p:txBody>
       </p:sp>
@@ -9083,7 +9202,7 @@
           <a:noFill/>
         </p:spPr>
         <p:txBody>
-          <a:bodyPr wrap="square" anchor="t" lIns="25400" rIns="25400" tIns="12700" bIns="12700">
+          <a:bodyPr wrap="square" lIns="25400" tIns="12700" rIns="25400" bIns="12700" anchor="t">
             <a:spAutoFit/>
           </a:bodyPr>
           <a:lstStyle/>
@@ -9164,6 +9283,7 @@
           <a:lstStyle/>
           <a:p>
             <a:pPr algn="ctr"/>
+            <a:endParaRPr/>
           </a:p>
         </p:txBody>
       </p:sp>
@@ -9244,6 +9364,7 @@
           <a:lstStyle/>
           <a:p>
             <a:pPr algn="ctr"/>
+            <a:endParaRPr/>
           </a:p>
         </p:txBody>
       </p:sp>
@@ -9324,6 +9445,7 @@
           <a:lstStyle/>
           <a:p>
             <a:pPr algn="ctr"/>
+            <a:endParaRPr/>
           </a:p>
         </p:txBody>
       </p:sp>
@@ -9404,6 +9526,7 @@
           <a:lstStyle/>
           <a:p>
             <a:pPr algn="ctr"/>
+            <a:endParaRPr/>
           </a:p>
         </p:txBody>
       </p:sp>
@@ -9460,7 +9583,7 @@
           <a:noFill/>
         </p:spPr>
         <p:txBody>
-          <a:bodyPr wrap="square" anchor="t" lIns="25400" rIns="25400" tIns="12700" bIns="12700">
+          <a:bodyPr wrap="square" lIns="25400" tIns="12700" rIns="25400" bIns="12700" anchor="t">
             <a:spAutoFit/>
           </a:bodyPr>
           <a:lstStyle/>
@@ -9522,6 +9645,7 @@
           <a:lstStyle/>
           <a:p>
             <a:pPr algn="ctr"/>
+            <a:endParaRPr/>
           </a:p>
         </p:txBody>
       </p:sp>
@@ -9566,6 +9690,7 @@
           <a:lstStyle/>
           <a:p>
             <a:pPr algn="ctr"/>
+            <a:endParaRPr/>
           </a:p>
         </p:txBody>
       </p:sp>
@@ -9586,7 +9711,7 @@
           <a:noFill/>
         </p:spPr>
         <p:txBody>
-          <a:bodyPr wrap="square" anchor="t" lIns="25400" rIns="25400" tIns="12700" bIns="12700">
+          <a:bodyPr wrap="square" lIns="25400" tIns="12700" rIns="25400" bIns="12700" anchor="t">
             <a:spAutoFit/>
           </a:bodyPr>
           <a:lstStyle/>
@@ -9622,7 +9747,7 @@
           <a:noFill/>
         </p:spPr>
         <p:txBody>
-          <a:bodyPr wrap="square" anchor="t" lIns="25400" rIns="25400" tIns="12700" bIns="12700">
+          <a:bodyPr wrap="square" lIns="25400" tIns="12700" rIns="25400" bIns="12700" anchor="t">
             <a:spAutoFit/>
           </a:bodyPr>
           <a:lstStyle/>
@@ -9682,7 +9807,7 @@
           </a:fontRef>
         </p:style>
         <p:txBody>
-          <a:bodyPr rtlCol="0" anchor="ctr" wrap="square" lIns="38100" rIns="38100" tIns="0" bIns="0"/>
+          <a:bodyPr wrap="square" lIns="38100" tIns="0" rIns="38100" bIns="0" rtlCol="0" anchor="ctr"/>
           <a:lstStyle/>
           <a:p>
             <a:pPr algn="ctr"/>
@@ -9716,7 +9841,7 @@
           <a:noFill/>
         </p:spPr>
         <p:txBody>
-          <a:bodyPr wrap="square" anchor="t" lIns="25400" rIns="25400" tIns="12700" bIns="12700">
+          <a:bodyPr wrap="square" lIns="25400" tIns="12700" rIns="25400" bIns="12700" anchor="t">
             <a:spAutoFit/>
           </a:bodyPr>
           <a:lstStyle/>
@@ -9793,7 +9918,7 @@
           </a:fontRef>
         </p:style>
         <p:txBody>
-          <a:bodyPr rtlCol="0" anchor="ctr" wrap="square" lIns="38100" rIns="38100" tIns="0" bIns="0"/>
+          <a:bodyPr wrap="square" lIns="38100" tIns="0" rIns="38100" bIns="0" rtlCol="0" anchor="ctr"/>
           <a:lstStyle/>
           <a:p>
             <a:pPr algn="ctr"/>
@@ -9827,7 +9952,7 @@
           <a:noFill/>
         </p:spPr>
         <p:txBody>
-          <a:bodyPr wrap="square" anchor="t" lIns="25400" rIns="25400" tIns="12700" bIns="12700">
+          <a:bodyPr wrap="square" lIns="25400" tIns="12700" rIns="25400" bIns="12700" anchor="t">
             <a:spAutoFit/>
           </a:bodyPr>
           <a:lstStyle/>
@@ -9904,7 +10029,7 @@
           </a:fontRef>
         </p:style>
         <p:txBody>
-          <a:bodyPr rtlCol="0" anchor="ctr" wrap="square" lIns="38100" rIns="38100" tIns="0" bIns="0"/>
+          <a:bodyPr wrap="square" lIns="38100" tIns="0" rIns="38100" bIns="0" rtlCol="0" anchor="ctr"/>
           <a:lstStyle/>
           <a:p>
             <a:pPr algn="ctr"/>
@@ -9938,7 +10063,7 @@
           <a:noFill/>
         </p:spPr>
         <p:txBody>
-          <a:bodyPr wrap="square" anchor="t" lIns="25400" rIns="25400" tIns="12700" bIns="12700">
+          <a:bodyPr wrap="square" lIns="25400" tIns="12700" rIns="25400" bIns="12700" anchor="t">
             <a:spAutoFit/>
           </a:bodyPr>
           <a:lstStyle/>
@@ -10019,6 +10144,7 @@
           <a:lstStyle/>
           <a:p>
             <a:pPr algn="ctr"/>
+            <a:endParaRPr/>
           </a:p>
         </p:txBody>
       </p:sp>
@@ -10039,7 +10165,7 @@
           <a:noFill/>
         </p:spPr>
         <p:txBody>
-          <a:bodyPr wrap="square" anchor="t" lIns="25400" rIns="25400" tIns="12700" bIns="12700">
+          <a:bodyPr wrap="square" lIns="25400" tIns="12700" rIns="25400" bIns="12700" anchor="t">
             <a:spAutoFit/>
           </a:bodyPr>
           <a:lstStyle/>
@@ -10103,6 +10229,7 @@
           <a:lstStyle/>
           <a:p>
             <a:pPr algn="ctr"/>
+            <a:endParaRPr/>
           </a:p>
         </p:txBody>
       </p:sp>
@@ -10147,6 +10274,7 @@
           <a:lstStyle/>
           <a:p>
             <a:pPr algn="ctr"/>
+            <a:endParaRPr/>
           </a:p>
         </p:txBody>
       </p:sp>
@@ -10167,7 +10295,7 @@
           <a:noFill/>
         </p:spPr>
         <p:txBody>
-          <a:bodyPr wrap="square" anchor="t" lIns="25400" rIns="25400" tIns="12700" bIns="12700">
+          <a:bodyPr wrap="square" lIns="25400" tIns="12700" rIns="25400" bIns="12700" anchor="t">
             <a:spAutoFit/>
           </a:bodyPr>
           <a:lstStyle/>
@@ -10216,7 +10344,7 @@
 </file>
 
 <file path=ppt/slides/slide4.xml><?xml version="1.0" encoding="utf-8"?>
-<p:sld xmlns:a="http://schemas.openxmlformats.org/drawingml/2006/main" xmlns:p="http://schemas.openxmlformats.org/presentationml/2006/main" xmlns:r="http://schemas.openxmlformats.org/officeDocument/2006/relationships">
+<p:sld xmlns:a="http://schemas.openxmlformats.org/drawingml/2006/main" xmlns:r="http://schemas.openxmlformats.org/officeDocument/2006/relationships" xmlns:p="http://schemas.openxmlformats.org/presentationml/2006/main">
   <p:cSld>
     <p:spTree>
       <p:nvGrpSpPr>
@@ -10224,7 +10352,14 @@
         <p:cNvGrpSpPr/>
         <p:nvPr/>
       </p:nvGrpSpPr>
-      <p:grpSpPr/>
+      <p:grpSpPr>
+        <a:xfrm>
+          <a:off x="0" y="0"/>
+          <a:ext cx="0" cy="0"/>
+          <a:chOff x="0" y="0"/>
+          <a:chExt cx="0" cy="0"/>
+        </a:xfrm>
+      </p:grpSpPr>
       <p:sp>
         <p:nvSpPr>
           <p:cNvPr id="2" name="Rectangle 1"/>
@@ -10266,6 +10401,7 @@
           <a:lstStyle/>
           <a:p>
             <a:pPr algn="ctr"/>
+            <a:endParaRPr/>
           </a:p>
         </p:txBody>
       </p:sp>
@@ -10310,6 +10446,7 @@
           <a:lstStyle/>
           <a:p>
             <a:pPr algn="ctr"/>
+            <a:endParaRPr/>
           </a:p>
         </p:txBody>
       </p:sp>
@@ -10330,7 +10467,7 @@
           <a:noFill/>
         </p:spPr>
         <p:txBody>
-          <a:bodyPr wrap="square" anchor="t" lIns="25400" rIns="25400" tIns="12700" bIns="12700">
+          <a:bodyPr wrap="square" lIns="25400" tIns="12700" rIns="25400" bIns="12700" anchor="t">
             <a:spAutoFit/>
           </a:bodyPr>
           <a:lstStyle/>
@@ -10390,6 +10527,7 @@
           <a:lstStyle/>
           <a:p>
             <a:pPr algn="ctr"/>
+            <a:endParaRPr/>
           </a:p>
         </p:txBody>
       </p:sp>
@@ -10410,7 +10548,7 @@
           <a:noFill/>
         </p:spPr>
         <p:txBody>
-          <a:bodyPr wrap="square" anchor="t" lIns="25400" rIns="25400" tIns="12700" bIns="12700">
+          <a:bodyPr wrap="square" lIns="25400" tIns="12700" rIns="25400" bIns="12700" anchor="t">
             <a:spAutoFit/>
           </a:bodyPr>
           <a:lstStyle/>
@@ -10466,7 +10604,7 @@
           </a:fontRef>
         </p:style>
         <p:txBody>
-          <a:bodyPr rtlCol="0" anchor="ctr" wrap="square" lIns="38100" rIns="38100" tIns="0" bIns="0"/>
+          <a:bodyPr wrap="square" lIns="38100" tIns="0" rIns="38100" bIns="0" rtlCol="0" anchor="ctr"/>
           <a:lstStyle/>
           <a:p>
             <a:pPr algn="ctr"/>
@@ -10520,7 +10658,7 @@
           </a:fontRef>
         </p:style>
         <p:txBody>
-          <a:bodyPr rtlCol="0" anchor="ctr" wrap="square" lIns="38100" rIns="38100" tIns="0" bIns="0"/>
+          <a:bodyPr wrap="square" lIns="38100" tIns="0" rIns="38100" bIns="0" rtlCol="0" anchor="ctr"/>
           <a:lstStyle/>
           <a:p>
             <a:pPr algn="ctr"/>
@@ -10574,7 +10712,7 @@
           </a:fontRef>
         </p:style>
         <p:txBody>
-          <a:bodyPr rtlCol="0" anchor="ctr" wrap="square" lIns="38100" rIns="38100" tIns="0" bIns="0"/>
+          <a:bodyPr wrap="square" lIns="38100" tIns="0" rIns="38100" bIns="0" rtlCol="0" anchor="ctr"/>
           <a:lstStyle/>
           <a:p>
             <a:pPr algn="ctr"/>
@@ -10608,7 +10746,7 @@
           <a:noFill/>
         </p:spPr>
         <p:txBody>
-          <a:bodyPr wrap="square" anchor="t" lIns="25400" rIns="25400" tIns="12700" bIns="12700">
+          <a:bodyPr wrap="square" lIns="25400" tIns="12700" rIns="25400" bIns="12700" anchor="t">
             <a:spAutoFit/>
           </a:bodyPr>
           <a:lstStyle/>
@@ -10644,7 +10782,7 @@
           <a:noFill/>
         </p:spPr>
         <p:txBody>
-          <a:bodyPr wrap="square" anchor="t" lIns="25400" rIns="25400" tIns="12700" bIns="12700">
+          <a:bodyPr wrap="square" lIns="25400" tIns="12700" rIns="25400" bIns="12700" anchor="t">
             <a:spAutoFit/>
           </a:bodyPr>
           <a:lstStyle/>
@@ -10704,6 +10842,7 @@
           <a:lstStyle/>
           <a:p>
             <a:pPr algn="ctr"/>
+            <a:endParaRPr/>
           </a:p>
         </p:txBody>
       </p:sp>
@@ -10724,7 +10863,7 @@
           <a:noFill/>
         </p:spPr>
         <p:txBody>
-          <a:bodyPr wrap="square" anchor="t" lIns="25400" rIns="25400" tIns="12700" bIns="12700">
+          <a:bodyPr wrap="square" lIns="25400" tIns="12700" rIns="25400" bIns="12700" anchor="t">
             <a:spAutoFit/>
           </a:bodyPr>
           <a:lstStyle/>
@@ -10760,7 +10899,7 @@
           <a:noFill/>
         </p:spPr>
         <p:txBody>
-          <a:bodyPr wrap="square" anchor="t" lIns="25400" rIns="25400" tIns="12700" bIns="12700">
+          <a:bodyPr wrap="square" lIns="25400" tIns="12700" rIns="25400" bIns="12700" anchor="t">
             <a:spAutoFit/>
           </a:bodyPr>
           <a:lstStyle/>
@@ -10796,7 +10935,7 @@
           <a:noFill/>
         </p:spPr>
         <p:txBody>
-          <a:bodyPr wrap="square" anchor="t" lIns="25400" rIns="25400" tIns="12700" bIns="12700">
+          <a:bodyPr wrap="square" lIns="25400" tIns="12700" rIns="25400" bIns="12700" anchor="t">
             <a:spAutoFit/>
           </a:bodyPr>
           <a:lstStyle/>
@@ -10832,7 +10971,7 @@
           <a:noFill/>
         </p:spPr>
         <p:txBody>
-          <a:bodyPr wrap="square" anchor="t" lIns="25400" rIns="25400" tIns="12700" bIns="12700">
+          <a:bodyPr wrap="square" lIns="25400" tIns="12700" rIns="25400" bIns="12700" anchor="t">
             <a:spAutoFit/>
           </a:bodyPr>
           <a:lstStyle/>
@@ -10868,7 +11007,7 @@
           <a:noFill/>
         </p:spPr>
         <p:txBody>
-          <a:bodyPr wrap="square" anchor="t" lIns="25400" rIns="25400" tIns="12700" bIns="12700">
+          <a:bodyPr wrap="square" lIns="25400" tIns="12700" rIns="25400" bIns="12700" anchor="t">
             <a:spAutoFit/>
           </a:bodyPr>
           <a:lstStyle/>
@@ -10930,6 +11069,7 @@
           <a:lstStyle/>
           <a:p>
             <a:pPr algn="ctr"/>
+            <a:endParaRPr/>
           </a:p>
         </p:txBody>
       </p:sp>
@@ -10950,7 +11090,7 @@
           <a:noFill/>
         </p:spPr>
         <p:txBody>
-          <a:bodyPr wrap="square" anchor="t" lIns="25400" rIns="25400" tIns="12700" bIns="12700">
+          <a:bodyPr wrap="square" lIns="25400" tIns="12700" rIns="25400" bIns="12700" anchor="t">
             <a:spAutoFit/>
           </a:bodyPr>
           <a:lstStyle/>
@@ -10986,7 +11126,7 @@
           <a:noFill/>
         </p:spPr>
         <p:txBody>
-          <a:bodyPr wrap="square" anchor="t" lIns="25400" rIns="25400" tIns="12700" bIns="12700">
+          <a:bodyPr wrap="square" lIns="25400" tIns="12700" rIns="25400" bIns="12700" anchor="t">
             <a:spAutoFit/>
           </a:bodyPr>
           <a:lstStyle/>
@@ -11022,7 +11162,7 @@
           <a:noFill/>
         </p:spPr>
         <p:txBody>
-          <a:bodyPr wrap="square" anchor="t" lIns="25400" rIns="25400" tIns="12700" bIns="12700">
+          <a:bodyPr wrap="square" lIns="25400" tIns="12700" rIns="25400" bIns="12700" anchor="t">
             <a:spAutoFit/>
           </a:bodyPr>
           <a:lstStyle/>
@@ -11058,7 +11198,7 @@
           <a:noFill/>
         </p:spPr>
         <p:txBody>
-          <a:bodyPr wrap="square" anchor="t" lIns="25400" rIns="25400" tIns="12700" bIns="12700">
+          <a:bodyPr wrap="square" lIns="25400" tIns="12700" rIns="25400" bIns="12700" anchor="t">
             <a:spAutoFit/>
           </a:bodyPr>
           <a:lstStyle/>
@@ -11094,7 +11234,7 @@
           <a:noFill/>
         </p:spPr>
         <p:txBody>
-          <a:bodyPr wrap="square" anchor="t" lIns="25400" rIns="25400" tIns="12700" bIns="12700">
+          <a:bodyPr wrap="square" lIns="25400" tIns="12700" rIns="25400" bIns="12700" anchor="t">
             <a:spAutoFit/>
           </a:bodyPr>
           <a:lstStyle/>
@@ -11156,6 +11296,7 @@
           <a:lstStyle/>
           <a:p>
             <a:pPr algn="ctr"/>
+            <a:endParaRPr/>
           </a:p>
         </p:txBody>
       </p:sp>
@@ -11176,7 +11317,7 @@
           <a:noFill/>
         </p:spPr>
         <p:txBody>
-          <a:bodyPr wrap="square" anchor="t" lIns="25400" rIns="25400" tIns="12700" bIns="12700">
+          <a:bodyPr wrap="square" lIns="25400" tIns="12700" rIns="25400" bIns="12700" anchor="t">
             <a:spAutoFit/>
           </a:bodyPr>
           <a:lstStyle/>
@@ -11212,7 +11353,7 @@
           <a:noFill/>
         </p:spPr>
         <p:txBody>
-          <a:bodyPr wrap="square" anchor="t" lIns="25400" rIns="25400" tIns="12700" bIns="12700">
+          <a:bodyPr wrap="square" lIns="25400" tIns="12700" rIns="25400" bIns="12700" anchor="t">
             <a:spAutoFit/>
           </a:bodyPr>
           <a:lstStyle/>
@@ -11248,7 +11389,7 @@
           <a:noFill/>
         </p:spPr>
         <p:txBody>
-          <a:bodyPr wrap="square" anchor="t" lIns="25400" rIns="25400" tIns="12700" bIns="12700">
+          <a:bodyPr wrap="square" lIns="25400" tIns="12700" rIns="25400" bIns="12700" anchor="t">
             <a:spAutoFit/>
           </a:bodyPr>
           <a:lstStyle/>
@@ -11284,7 +11425,7 @@
           <a:noFill/>
         </p:spPr>
         <p:txBody>
-          <a:bodyPr wrap="square" anchor="t" lIns="25400" rIns="25400" tIns="12700" bIns="12700">
+          <a:bodyPr wrap="square" lIns="25400" tIns="12700" rIns="25400" bIns="12700" anchor="t">
             <a:spAutoFit/>
           </a:bodyPr>
           <a:lstStyle/>
@@ -11320,7 +11461,7 @@
           <a:noFill/>
         </p:spPr>
         <p:txBody>
-          <a:bodyPr wrap="square" anchor="t" lIns="25400" rIns="25400" tIns="12700" bIns="12700">
+          <a:bodyPr wrap="square" lIns="25400" tIns="12700" rIns="25400" bIns="12700" anchor="t">
             <a:spAutoFit/>
           </a:bodyPr>
           <a:lstStyle/>
@@ -11382,6 +11523,7 @@
           <a:lstStyle/>
           <a:p>
             <a:pPr algn="ctr"/>
+            <a:endParaRPr/>
           </a:p>
         </p:txBody>
       </p:sp>
@@ -11402,7 +11544,7 @@
           <a:noFill/>
         </p:spPr>
         <p:txBody>
-          <a:bodyPr wrap="square" anchor="t" lIns="25400" rIns="25400" tIns="12700" bIns="12700">
+          <a:bodyPr wrap="square" lIns="25400" tIns="12700" rIns="25400" bIns="12700" anchor="t">
             <a:spAutoFit/>
           </a:bodyPr>
           <a:lstStyle/>
@@ -11438,7 +11580,7 @@
           <a:noFill/>
         </p:spPr>
         <p:txBody>
-          <a:bodyPr wrap="square" anchor="t" lIns="25400" rIns="25400" tIns="12700" bIns="12700">
+          <a:bodyPr wrap="square" lIns="25400" tIns="12700" rIns="25400" bIns="12700" anchor="t">
             <a:spAutoFit/>
           </a:bodyPr>
           <a:lstStyle/>
@@ -11474,7 +11616,7 @@
           <a:noFill/>
         </p:spPr>
         <p:txBody>
-          <a:bodyPr wrap="square" anchor="t" lIns="25400" rIns="25400" tIns="12700" bIns="12700">
+          <a:bodyPr wrap="square" lIns="25400" tIns="12700" rIns="25400" bIns="12700" anchor="t">
             <a:spAutoFit/>
           </a:bodyPr>
           <a:lstStyle/>
@@ -11510,7 +11652,7 @@
           <a:noFill/>
         </p:spPr>
         <p:txBody>
-          <a:bodyPr wrap="square" anchor="t" lIns="25400" rIns="25400" tIns="12700" bIns="12700">
+          <a:bodyPr wrap="square" lIns="25400" tIns="12700" rIns="25400" bIns="12700" anchor="t">
             <a:spAutoFit/>
           </a:bodyPr>
           <a:lstStyle/>
@@ -11546,7 +11688,7 @@
           <a:noFill/>
         </p:spPr>
         <p:txBody>
-          <a:bodyPr wrap="square" anchor="t" lIns="25400" rIns="25400" tIns="12700" bIns="12700">
+          <a:bodyPr wrap="square" lIns="25400" tIns="12700" rIns="25400" bIns="12700" anchor="t">
             <a:spAutoFit/>
           </a:bodyPr>
           <a:lstStyle/>
@@ -11608,6 +11750,7 @@
           <a:lstStyle/>
           <a:p>
             <a:pPr algn="ctr"/>
+            <a:endParaRPr/>
           </a:p>
         </p:txBody>
       </p:sp>
@@ -11628,7 +11771,7 @@
           <a:noFill/>
         </p:spPr>
         <p:txBody>
-          <a:bodyPr wrap="square" anchor="t" lIns="25400" rIns="25400" tIns="12700" bIns="12700">
+          <a:bodyPr wrap="square" lIns="25400" tIns="12700" rIns="25400" bIns="12700" anchor="t">
             <a:spAutoFit/>
           </a:bodyPr>
           <a:lstStyle/>
@@ -11664,7 +11807,7 @@
           <a:noFill/>
         </p:spPr>
         <p:txBody>
-          <a:bodyPr wrap="square" anchor="t" lIns="25400" rIns="25400" tIns="12700" bIns="12700">
+          <a:bodyPr wrap="square" lIns="25400" tIns="12700" rIns="25400" bIns="12700" anchor="t">
             <a:spAutoFit/>
           </a:bodyPr>
           <a:lstStyle/>
@@ -11700,7 +11843,7 @@
           <a:noFill/>
         </p:spPr>
         <p:txBody>
-          <a:bodyPr wrap="square" anchor="t" lIns="25400" rIns="25400" tIns="12700" bIns="12700">
+          <a:bodyPr wrap="square" lIns="25400" tIns="12700" rIns="25400" bIns="12700" anchor="t">
             <a:spAutoFit/>
           </a:bodyPr>
           <a:lstStyle/>
@@ -11736,7 +11879,7 @@
           <a:noFill/>
         </p:spPr>
         <p:txBody>
-          <a:bodyPr wrap="square" anchor="t" lIns="25400" rIns="25400" tIns="12700" bIns="12700">
+          <a:bodyPr wrap="square" lIns="25400" tIns="12700" rIns="25400" bIns="12700" anchor="t">
             <a:spAutoFit/>
           </a:bodyPr>
           <a:lstStyle/>
@@ -11772,7 +11915,7 @@
           <a:noFill/>
         </p:spPr>
         <p:txBody>
-          <a:bodyPr wrap="square" anchor="t" lIns="25400" rIns="25400" tIns="12700" bIns="12700">
+          <a:bodyPr wrap="square" lIns="25400" tIns="12700" rIns="25400" bIns="12700" anchor="t">
             <a:spAutoFit/>
           </a:bodyPr>
           <a:lstStyle/>
@@ -11832,6 +11975,7 @@
           <a:lstStyle/>
           <a:p>
             <a:pPr algn="ctr"/>
+            <a:endParaRPr/>
           </a:p>
         </p:txBody>
       </p:sp>
@@ -11876,6 +12020,7 @@
           <a:lstStyle/>
           <a:p>
             <a:pPr algn="ctr"/>
+            <a:endParaRPr/>
           </a:p>
         </p:txBody>
       </p:sp>
@@ -11896,7 +12041,7 @@
           <a:noFill/>
         </p:spPr>
         <p:txBody>
-          <a:bodyPr wrap="square" anchor="t" lIns="25400" rIns="25400" tIns="12700" bIns="12700">
+          <a:bodyPr wrap="square" lIns="25400" tIns="12700" rIns="25400" bIns="12700" anchor="t">
             <a:spAutoFit/>
           </a:bodyPr>
           <a:lstStyle/>
@@ -11977,6 +12122,7 @@
           <a:lstStyle/>
           <a:p>
             <a:pPr algn="ctr"/>
+            <a:endParaRPr/>
           </a:p>
         </p:txBody>
       </p:sp>
@@ -12021,6 +12167,7 @@
           <a:lstStyle/>
           <a:p>
             <a:pPr algn="ctr"/>
+            <a:endParaRPr/>
           </a:p>
         </p:txBody>
       </p:sp>
@@ -12041,7 +12188,7 @@
           <a:noFill/>
         </p:spPr>
         <p:txBody>
-          <a:bodyPr wrap="square" anchor="t" lIns="25400" rIns="25400" tIns="12700" bIns="12700">
+          <a:bodyPr wrap="square" lIns="25400" tIns="12700" rIns="25400" bIns="12700" anchor="t">
             <a:spAutoFit/>
           </a:bodyPr>
           <a:lstStyle/>
@@ -12098,7 +12245,7 @@
           <a:noFill/>
         </p:spPr>
         <p:txBody>
-          <a:bodyPr wrap="square" anchor="t" lIns="25400" rIns="25400" tIns="12700" bIns="12700">
+          <a:bodyPr wrap="square" lIns="25400" tIns="12700" rIns="25400" bIns="12700" anchor="t">
             <a:spAutoFit/>
           </a:bodyPr>
           <a:lstStyle/>
@@ -12164,7 +12311,7 @@
 </file>
 
 <file path=ppt/slides/slide5.xml><?xml version="1.0" encoding="utf-8"?>
-<p:sld xmlns:a="http://schemas.openxmlformats.org/drawingml/2006/main" xmlns:p="http://schemas.openxmlformats.org/presentationml/2006/main" xmlns:r="http://schemas.openxmlformats.org/officeDocument/2006/relationships">
+<p:sld xmlns:a="http://schemas.openxmlformats.org/drawingml/2006/main" xmlns:r="http://schemas.openxmlformats.org/officeDocument/2006/relationships" xmlns:p="http://schemas.openxmlformats.org/presentationml/2006/main">
   <p:cSld>
     <p:spTree>
       <p:nvGrpSpPr>
@@ -12172,7 +12319,14 @@
         <p:cNvGrpSpPr/>
         <p:nvPr/>
       </p:nvGrpSpPr>
-      <p:grpSpPr/>
+      <p:grpSpPr>
+        <a:xfrm>
+          <a:off x="0" y="0"/>
+          <a:ext cx="0" cy="0"/>
+          <a:chOff x="0" y="0"/>
+          <a:chExt cx="0" cy="0"/>
+        </a:xfrm>
+      </p:grpSpPr>
       <p:sp>
         <p:nvSpPr>
           <p:cNvPr id="2" name="Rectangle 1"/>
@@ -12214,6 +12368,7 @@
           <a:lstStyle/>
           <a:p>
             <a:pPr algn="ctr"/>
+            <a:endParaRPr/>
           </a:p>
         </p:txBody>
       </p:sp>
@@ -12258,6 +12413,7 @@
           <a:lstStyle/>
           <a:p>
             <a:pPr algn="ctr"/>
+            <a:endParaRPr/>
           </a:p>
         </p:txBody>
       </p:sp>
@@ -12278,7 +12434,7 @@
           <a:noFill/>
         </p:spPr>
         <p:txBody>
-          <a:bodyPr wrap="square" anchor="t" lIns="25400" rIns="25400" tIns="12700" bIns="12700">
+          <a:bodyPr wrap="square" lIns="25400" tIns="12700" rIns="25400" bIns="12700" anchor="t">
             <a:spAutoFit/>
           </a:bodyPr>
           <a:lstStyle/>
@@ -12338,6 +12494,7 @@
           <a:lstStyle/>
           <a:p>
             <a:pPr algn="ctr"/>
+            <a:endParaRPr/>
           </a:p>
         </p:txBody>
       </p:sp>
@@ -12358,7 +12515,7 @@
           <a:noFill/>
         </p:spPr>
         <p:txBody>
-          <a:bodyPr wrap="square" anchor="t" lIns="25400" rIns="25400" tIns="12700" bIns="12700">
+          <a:bodyPr wrap="square" lIns="25400" tIns="12700" rIns="25400" bIns="12700" anchor="t">
             <a:spAutoFit/>
           </a:bodyPr>
           <a:lstStyle/>
@@ -12414,7 +12571,7 @@
           </a:fontRef>
         </p:style>
         <p:txBody>
-          <a:bodyPr rtlCol="0" anchor="ctr" wrap="square" lIns="38100" rIns="38100" tIns="0" bIns="0"/>
+          <a:bodyPr wrap="square" lIns="38100" tIns="0" rIns="38100" bIns="0" rtlCol="0" anchor="ctr"/>
           <a:lstStyle/>
           <a:p>
             <a:pPr algn="ctr"/>
@@ -12468,7 +12625,7 @@
           </a:fontRef>
         </p:style>
         <p:txBody>
-          <a:bodyPr rtlCol="0" anchor="ctr" wrap="square" lIns="38100" rIns="38100" tIns="0" bIns="0"/>
+          <a:bodyPr wrap="square" lIns="38100" tIns="0" rIns="38100" bIns="0" rtlCol="0" anchor="ctr"/>
           <a:lstStyle/>
           <a:p>
             <a:pPr algn="ctr"/>
@@ -12522,7 +12679,7 @@
           </a:fontRef>
         </p:style>
         <p:txBody>
-          <a:bodyPr rtlCol="0" anchor="ctr" wrap="square" lIns="38100" rIns="38100" tIns="0" bIns="0"/>
+          <a:bodyPr wrap="square" lIns="38100" tIns="0" rIns="38100" bIns="0" rtlCol="0" anchor="ctr"/>
           <a:lstStyle/>
           <a:p>
             <a:pPr algn="ctr"/>
@@ -12556,7 +12713,7 @@
           <a:noFill/>
         </p:spPr>
         <p:txBody>
-          <a:bodyPr wrap="square" anchor="t" lIns="25400" rIns="25400" tIns="12700" bIns="12700">
+          <a:bodyPr wrap="square" lIns="25400" tIns="12700" rIns="25400" bIns="12700" anchor="t">
             <a:spAutoFit/>
           </a:bodyPr>
           <a:lstStyle/>
@@ -12592,7 +12749,7 @@
           <a:noFill/>
         </p:spPr>
         <p:txBody>
-          <a:bodyPr wrap="square" anchor="t" lIns="25400" rIns="25400" tIns="12700" bIns="12700">
+          <a:bodyPr wrap="square" lIns="25400" tIns="12700" rIns="25400" bIns="12700" anchor="t">
             <a:spAutoFit/>
           </a:bodyPr>
           <a:lstStyle/>
@@ -12654,6 +12811,7 @@
           <a:lstStyle/>
           <a:p>
             <a:pPr algn="ctr"/>
+            <a:endParaRPr/>
           </a:p>
         </p:txBody>
       </p:sp>
@@ -12698,6 +12856,7 @@
           <a:lstStyle/>
           <a:p>
             <a:pPr algn="ctr"/>
+            <a:endParaRPr/>
           </a:p>
         </p:txBody>
       </p:sp>
@@ -12718,7 +12877,7 @@
           <a:noFill/>
         </p:spPr>
         <p:txBody>
-          <a:bodyPr wrap="square" anchor="t" lIns="25400" rIns="25400" tIns="12700" bIns="12700">
+          <a:bodyPr wrap="square" lIns="25400" tIns="12700" rIns="25400" bIns="12700" anchor="t">
             <a:spAutoFit/>
           </a:bodyPr>
           <a:lstStyle/>
@@ -12778,6 +12937,7 @@
           <a:lstStyle/>
           <a:p>
             <a:pPr algn="ctr"/>
+            <a:endParaRPr/>
           </a:p>
         </p:txBody>
       </p:sp>
@@ -12798,7 +12958,7 @@
           <a:noFill/>
         </p:spPr>
         <p:txBody>
-          <a:bodyPr wrap="square" anchor="t" lIns="25400" rIns="25400" tIns="12700" bIns="12700">
+          <a:bodyPr wrap="square" lIns="25400" tIns="12700" rIns="25400" bIns="12700" anchor="t">
             <a:spAutoFit/>
           </a:bodyPr>
           <a:lstStyle/>
@@ -12872,6 +13032,7 @@
           <a:lstStyle/>
           <a:p>
             <a:pPr algn="ctr"/>
+            <a:endParaRPr/>
           </a:p>
         </p:txBody>
       </p:sp>
@@ -12892,7 +13053,7 @@
           <a:noFill/>
         </p:spPr>
         <p:txBody>
-          <a:bodyPr wrap="square" anchor="t" lIns="25400" rIns="25400" tIns="12700" bIns="12700">
+          <a:bodyPr wrap="square" lIns="25400" tIns="12700" rIns="25400" bIns="12700" anchor="t">
             <a:spAutoFit/>
           </a:bodyPr>
           <a:lstStyle/>
@@ -12966,6 +13127,7 @@
           <a:lstStyle/>
           <a:p>
             <a:pPr algn="ctr"/>
+            <a:endParaRPr/>
           </a:p>
         </p:txBody>
       </p:sp>
@@ -12986,7 +13148,7 @@
           <a:noFill/>
         </p:spPr>
         <p:txBody>
-          <a:bodyPr wrap="square" anchor="t" lIns="25400" rIns="25400" tIns="12700" bIns="12700">
+          <a:bodyPr wrap="square" lIns="25400" tIns="12700" rIns="25400" bIns="12700" anchor="t">
             <a:spAutoFit/>
           </a:bodyPr>
           <a:lstStyle/>
@@ -13062,6 +13224,7 @@
           <a:lstStyle/>
           <a:p>
             <a:pPr algn="ctr"/>
+            <a:endParaRPr/>
           </a:p>
         </p:txBody>
       </p:sp>
@@ -13106,6 +13269,7 @@
           <a:lstStyle/>
           <a:p>
             <a:pPr algn="ctr"/>
+            <a:endParaRPr/>
           </a:p>
         </p:txBody>
       </p:sp>
@@ -13126,7 +13290,7 @@
           <a:noFill/>
         </p:spPr>
         <p:txBody>
-          <a:bodyPr wrap="square" anchor="t" lIns="25400" rIns="25400" tIns="12700" bIns="12700">
+          <a:bodyPr wrap="square" lIns="25400" tIns="12700" rIns="25400" bIns="12700" anchor="t">
             <a:spAutoFit/>
           </a:bodyPr>
           <a:lstStyle/>
@@ -13182,7 +13346,7 @@
           </a:fontRef>
         </p:style>
         <p:txBody>
-          <a:bodyPr rtlCol="0" anchor="ctr" wrap="square" lIns="38100" rIns="38100" tIns="0" bIns="0"/>
+          <a:bodyPr wrap="square" lIns="38100" tIns="0" rIns="38100" bIns="0" rtlCol="0" anchor="ctr"/>
           <a:lstStyle/>
           <a:p>
             <a:pPr algn="ctr"/>
@@ -13216,7 +13380,7 @@
           <a:noFill/>
         </p:spPr>
         <p:txBody>
-          <a:bodyPr wrap="square" anchor="t" lIns="25400" rIns="25400" tIns="12700" bIns="12700">
+          <a:bodyPr wrap="square" lIns="25400" tIns="12700" rIns="25400" bIns="12700" anchor="t">
             <a:spAutoFit/>
           </a:bodyPr>
           <a:lstStyle/>
@@ -13272,7 +13436,7 @@
           </a:fontRef>
         </p:style>
         <p:txBody>
-          <a:bodyPr rtlCol="0" anchor="ctr" wrap="square" lIns="38100" rIns="38100" tIns="0" bIns="0"/>
+          <a:bodyPr wrap="square" lIns="38100" tIns="0" rIns="38100" bIns="0" rtlCol="0" anchor="ctr"/>
           <a:lstStyle/>
           <a:p>
             <a:pPr algn="ctr"/>
@@ -13306,7 +13470,7 @@
           <a:noFill/>
         </p:spPr>
         <p:txBody>
-          <a:bodyPr wrap="square" anchor="t" lIns="25400" rIns="25400" tIns="12700" bIns="12700">
+          <a:bodyPr wrap="square" lIns="25400" tIns="12700" rIns="25400" bIns="12700" anchor="t">
             <a:spAutoFit/>
           </a:bodyPr>
           <a:lstStyle/>
@@ -13362,7 +13526,7 @@
           </a:fontRef>
         </p:style>
         <p:txBody>
-          <a:bodyPr rtlCol="0" anchor="ctr" wrap="square" lIns="38100" rIns="38100" tIns="0" bIns="0"/>
+          <a:bodyPr wrap="square" lIns="38100" tIns="0" rIns="38100" bIns="0" rtlCol="0" anchor="ctr"/>
           <a:lstStyle/>
           <a:p>
             <a:pPr algn="ctr"/>
@@ -13396,7 +13560,7 @@
           <a:noFill/>
         </p:spPr>
         <p:txBody>
-          <a:bodyPr wrap="square" anchor="t" lIns="25400" rIns="25400" tIns="12700" bIns="12700">
+          <a:bodyPr wrap="square" lIns="25400" tIns="12700" rIns="25400" bIns="12700" anchor="t">
             <a:spAutoFit/>
           </a:bodyPr>
           <a:lstStyle/>
@@ -13432,7 +13596,7 @@
           <a:noFill/>
         </p:spPr>
         <p:txBody>
-          <a:bodyPr wrap="square" anchor="t" lIns="25400" rIns="25400" tIns="12700" bIns="12700">
+          <a:bodyPr wrap="square" lIns="25400" tIns="12700" rIns="25400" bIns="12700" anchor="t">
             <a:spAutoFit/>
           </a:bodyPr>
           <a:lstStyle/>
@@ -13494,6 +13658,7 @@
           <a:lstStyle/>
           <a:p>
             <a:pPr algn="ctr"/>
+            <a:endParaRPr/>
           </a:p>
         </p:txBody>
       </p:sp>
@@ -13514,7 +13679,7 @@
           <a:noFill/>
         </p:spPr>
         <p:txBody>
-          <a:bodyPr wrap="square" anchor="t" lIns="25400" rIns="25400" tIns="12700" bIns="12700">
+          <a:bodyPr wrap="square" lIns="25400" tIns="12700" rIns="25400" bIns="12700" anchor="t">
             <a:spAutoFit/>
           </a:bodyPr>
           <a:lstStyle/>
@@ -13574,6 +13739,7 @@
           <a:lstStyle/>
           <a:p>
             <a:pPr algn="ctr"/>
+            <a:endParaRPr/>
           </a:p>
         </p:txBody>
       </p:sp>
@@ -13618,6 +13784,7 @@
           <a:lstStyle/>
           <a:p>
             <a:pPr algn="ctr"/>
+            <a:endParaRPr/>
           </a:p>
         </p:txBody>
       </p:sp>
@@ -13638,7 +13805,7 @@
           <a:noFill/>
         </p:spPr>
         <p:txBody>
-          <a:bodyPr wrap="square" anchor="t" lIns="25400" rIns="25400" tIns="12700" bIns="12700">
+          <a:bodyPr wrap="square" lIns="25400" tIns="12700" rIns="25400" bIns="12700" anchor="t">
             <a:spAutoFit/>
           </a:bodyPr>
           <a:lstStyle/>
@@ -13700,6 +13867,7 @@
           <a:lstStyle/>
           <a:p>
             <a:pPr algn="ctr"/>
+            <a:endParaRPr/>
           </a:p>
         </p:txBody>
       </p:sp>
@@ -13746,6 +13914,7 @@
           <a:lstStyle/>
           <a:p>
             <a:pPr algn="ctr"/>
+            <a:endParaRPr/>
           </a:p>
         </p:txBody>
       </p:sp>
@@ -13792,6 +13961,7 @@
           <a:lstStyle/>
           <a:p>
             <a:pPr algn="ctr"/>
+            <a:endParaRPr/>
           </a:p>
         </p:txBody>
       </p:sp>
@@ -13838,6 +14008,7 @@
           <a:lstStyle/>
           <a:p>
             <a:pPr algn="ctr"/>
+            <a:endParaRPr/>
           </a:p>
         </p:txBody>
       </p:sp>
@@ -13884,6 +14055,7 @@
           <a:lstStyle/>
           <a:p>
             <a:pPr algn="ctr"/>
+            <a:endParaRPr/>
           </a:p>
         </p:txBody>
       </p:sp>
@@ -13904,7 +14076,7 @@
           <a:noFill/>
         </p:spPr>
         <p:txBody>
-          <a:bodyPr wrap="square" anchor="t" lIns="25400" rIns="25400" tIns="12700" bIns="12700">
+          <a:bodyPr wrap="square" lIns="25400" tIns="12700" rIns="25400" bIns="12700" anchor="t">
             <a:spAutoFit/>
           </a:bodyPr>
           <a:lstStyle/>
@@ -13940,7 +14112,7 @@
           <a:noFill/>
         </p:spPr>
         <p:txBody>
-          <a:bodyPr wrap="square" anchor="t" lIns="25400" rIns="25400" tIns="12700" bIns="12700">
+          <a:bodyPr wrap="square" lIns="25400" tIns="12700" rIns="25400" bIns="12700" anchor="t">
             <a:spAutoFit/>
           </a:bodyPr>
           <a:lstStyle/>
@@ -13976,7 +14148,7 @@
           <a:noFill/>
         </p:spPr>
         <p:txBody>
-          <a:bodyPr wrap="square" anchor="t" lIns="25400" rIns="25400" tIns="12700" bIns="12700">
+          <a:bodyPr wrap="square" lIns="25400" tIns="12700" rIns="25400" bIns="12700" anchor="t">
             <a:spAutoFit/>
           </a:bodyPr>
           <a:lstStyle/>
@@ -14025,7 +14197,7 @@
 </file>
 
 <file path=ppt/slides/slide6.xml><?xml version="1.0" encoding="utf-8"?>
-<p:sld xmlns:a="http://schemas.openxmlformats.org/drawingml/2006/main" xmlns:p="http://schemas.openxmlformats.org/presentationml/2006/main" xmlns:r="http://schemas.openxmlformats.org/officeDocument/2006/relationships">
+<p:sld xmlns:a="http://schemas.openxmlformats.org/drawingml/2006/main" xmlns:r="http://schemas.openxmlformats.org/officeDocument/2006/relationships" xmlns:p="http://schemas.openxmlformats.org/presentationml/2006/main">
   <p:cSld>
     <p:spTree>
       <p:nvGrpSpPr>
@@ -14033,7 +14205,14 @@
         <p:cNvGrpSpPr/>
         <p:nvPr/>
       </p:nvGrpSpPr>
-      <p:grpSpPr/>
+      <p:grpSpPr>
+        <a:xfrm>
+          <a:off x="0" y="0"/>
+          <a:ext cx="0" cy="0"/>
+          <a:chOff x="0" y="0"/>
+          <a:chExt cx="0" cy="0"/>
+        </a:xfrm>
+      </p:grpSpPr>
       <p:sp>
         <p:nvSpPr>
           <p:cNvPr id="2" name="Rectangle 1"/>
@@ -14075,6 +14254,7 @@
           <a:lstStyle/>
           <a:p>
             <a:pPr algn="ctr"/>
+            <a:endParaRPr/>
           </a:p>
         </p:txBody>
       </p:sp>
@@ -14119,6 +14299,7 @@
           <a:lstStyle/>
           <a:p>
             <a:pPr algn="ctr"/>
+            <a:endParaRPr/>
           </a:p>
         </p:txBody>
       </p:sp>
@@ -14139,7 +14320,7 @@
           <a:noFill/>
         </p:spPr>
         <p:txBody>
-          <a:bodyPr wrap="square" anchor="t" lIns="25400" rIns="25400" tIns="12700" bIns="12700">
+          <a:bodyPr wrap="square" lIns="25400" tIns="12700" rIns="25400" bIns="12700" anchor="t">
             <a:spAutoFit/>
           </a:bodyPr>
           <a:lstStyle/>
@@ -14199,6 +14380,7 @@
           <a:lstStyle/>
           <a:p>
             <a:pPr algn="ctr"/>
+            <a:endParaRPr/>
           </a:p>
         </p:txBody>
       </p:sp>
@@ -14219,7 +14401,7 @@
           <a:noFill/>
         </p:spPr>
         <p:txBody>
-          <a:bodyPr wrap="square" anchor="t" lIns="25400" rIns="25400" tIns="12700" bIns="12700">
+          <a:bodyPr wrap="square" lIns="25400" tIns="12700" rIns="25400" bIns="12700" anchor="t">
             <a:spAutoFit/>
           </a:bodyPr>
           <a:lstStyle/>
@@ -14275,7 +14457,7 @@
           </a:fontRef>
         </p:style>
         <p:txBody>
-          <a:bodyPr rtlCol="0" anchor="ctr" wrap="square" lIns="38100" rIns="38100" tIns="0" bIns="0"/>
+          <a:bodyPr wrap="square" lIns="38100" tIns="0" rIns="38100" bIns="0" rtlCol="0" anchor="ctr"/>
           <a:lstStyle/>
           <a:p>
             <a:pPr algn="ctr"/>
@@ -14329,7 +14511,7 @@
           </a:fontRef>
         </p:style>
         <p:txBody>
-          <a:bodyPr rtlCol="0" anchor="ctr" wrap="square" lIns="38100" rIns="38100" tIns="0" bIns="0"/>
+          <a:bodyPr wrap="square" lIns="38100" tIns="0" rIns="38100" bIns="0" rtlCol="0" anchor="ctr"/>
           <a:lstStyle/>
           <a:p>
             <a:pPr algn="ctr"/>
@@ -14383,7 +14565,7 @@
           </a:fontRef>
         </p:style>
         <p:txBody>
-          <a:bodyPr rtlCol="0" anchor="ctr" wrap="square" lIns="38100" rIns="38100" tIns="0" bIns="0"/>
+          <a:bodyPr wrap="square" lIns="38100" tIns="0" rIns="38100" bIns="0" rtlCol="0" anchor="ctr"/>
           <a:lstStyle/>
           <a:p>
             <a:pPr algn="ctr"/>
@@ -14417,7 +14599,7 @@
           <a:noFill/>
         </p:spPr>
         <p:txBody>
-          <a:bodyPr wrap="square" anchor="t" lIns="25400" rIns="25400" tIns="12700" bIns="12700">
+          <a:bodyPr wrap="square" lIns="25400" tIns="12700" rIns="25400" bIns="12700" anchor="t">
             <a:spAutoFit/>
           </a:bodyPr>
           <a:lstStyle/>
@@ -14453,7 +14635,7 @@
           <a:noFill/>
         </p:spPr>
         <p:txBody>
-          <a:bodyPr wrap="square" anchor="t" lIns="25400" rIns="25400" tIns="12700" bIns="12700">
+          <a:bodyPr wrap="square" lIns="25400" tIns="12700" rIns="25400" bIns="12700" anchor="t">
             <a:spAutoFit/>
           </a:bodyPr>
           <a:lstStyle/>
@@ -14511,7 +14693,7 @@
           </a:fontRef>
         </p:style>
         <p:txBody>
-          <a:bodyPr rtlCol="0" anchor="ctr" wrap="square" lIns="38100" rIns="38100" tIns="0" bIns="0"/>
+          <a:bodyPr wrap="square" lIns="38100" tIns="0" rIns="38100" bIns="0" rtlCol="0" anchor="ctr"/>
           <a:lstStyle/>
           <a:p>
             <a:pPr algn="ctr"/>
@@ -14567,7 +14749,7 @@
           </a:fontRef>
         </p:style>
         <p:txBody>
-          <a:bodyPr rtlCol="0" anchor="ctr" wrap="square" lIns="38100" rIns="38100" tIns="0" bIns="0"/>
+          <a:bodyPr wrap="square" lIns="38100" tIns="0" rIns="38100" bIns="0" rtlCol="0" anchor="ctr"/>
           <a:lstStyle/>
           <a:p>
             <a:pPr algn="ctr"/>
@@ -14623,7 +14805,7 @@
           </a:fontRef>
         </p:style>
         <p:txBody>
-          <a:bodyPr rtlCol="0" anchor="ctr" wrap="square" lIns="38100" rIns="38100" tIns="0" bIns="0"/>
+          <a:bodyPr wrap="square" lIns="38100" tIns="0" rIns="38100" bIns="0" rtlCol="0" anchor="ctr"/>
           <a:lstStyle/>
           <a:p>
             <a:pPr algn="ctr"/>
@@ -14679,7 +14861,7 @@
           </a:fontRef>
         </p:style>
         <p:txBody>
-          <a:bodyPr rtlCol="0" anchor="ctr" wrap="square" lIns="38100" rIns="38100" tIns="0" bIns="0"/>
+          <a:bodyPr wrap="square" lIns="38100" tIns="0" rIns="38100" bIns="0" rtlCol="0" anchor="ctr"/>
           <a:lstStyle/>
           <a:p>
             <a:pPr algn="ctr"/>
@@ -14735,7 +14917,7 @@
           </a:fontRef>
         </p:style>
         <p:txBody>
-          <a:bodyPr rtlCol="0" anchor="ctr" wrap="square" lIns="38100" rIns="38100" tIns="0" bIns="0"/>
+          <a:bodyPr wrap="square" lIns="38100" tIns="0" rIns="38100" bIns="0" rtlCol="0" anchor="ctr"/>
           <a:lstStyle/>
           <a:p>
             <a:pPr algn="ctr"/>
@@ -14791,7 +14973,7 @@
           </a:fontRef>
         </p:style>
         <p:txBody>
-          <a:bodyPr rtlCol="0" anchor="ctr" wrap="square" lIns="38100" rIns="38100" tIns="0" bIns="0"/>
+          <a:bodyPr wrap="square" lIns="38100" tIns="0" rIns="38100" bIns="0" rtlCol="0" anchor="ctr"/>
           <a:lstStyle/>
           <a:p>
             <a:pPr algn="ctr"/>
@@ -14847,7 +15029,7 @@
           </a:fontRef>
         </p:style>
         <p:txBody>
-          <a:bodyPr rtlCol="0" anchor="ctr" wrap="square" lIns="38100" rIns="38100" tIns="0" bIns="0"/>
+          <a:bodyPr wrap="square" lIns="38100" tIns="0" rIns="38100" bIns="0" rtlCol="0" anchor="ctr"/>
           <a:lstStyle/>
           <a:p>
             <a:pPr algn="ctr"/>
@@ -14903,7 +15085,7 @@
           </a:fontRef>
         </p:style>
         <p:txBody>
-          <a:bodyPr rtlCol="0" anchor="ctr" wrap="square" lIns="38100" rIns="38100" tIns="0" bIns="0"/>
+          <a:bodyPr wrap="square" lIns="38100" tIns="0" rIns="38100" bIns="0" rtlCol="0" anchor="ctr"/>
           <a:lstStyle/>
           <a:p>
             <a:pPr algn="ctr"/>
@@ -14961,6 +15143,7 @@
           <a:lstStyle/>
           <a:p>
             <a:pPr algn="ctr"/>
+            <a:endParaRPr/>
           </a:p>
         </p:txBody>
       </p:sp>
@@ -14981,7 +15164,7 @@
           <a:noFill/>
         </p:spPr>
         <p:txBody>
-          <a:bodyPr wrap="square" anchor="t" lIns="25400" rIns="25400" tIns="12700" bIns="12700">
+          <a:bodyPr wrap="square" lIns="25400" tIns="12700" rIns="25400" bIns="12700" anchor="t">
             <a:spAutoFit/>
           </a:bodyPr>
           <a:lstStyle/>
@@ -15017,7 +15200,7 @@
           <a:noFill/>
         </p:spPr>
         <p:txBody>
-          <a:bodyPr wrap="square" anchor="t" lIns="25400" rIns="25400" tIns="12700" bIns="12700">
+          <a:bodyPr wrap="square" lIns="25400" tIns="12700" rIns="25400" bIns="12700" anchor="t">
             <a:spAutoFit/>
           </a:bodyPr>
           <a:lstStyle/>
@@ -15053,7 +15236,7 @@
           <a:noFill/>
         </p:spPr>
         <p:txBody>
-          <a:bodyPr wrap="square" anchor="t" lIns="25400" rIns="25400" tIns="12700" bIns="12700">
+          <a:bodyPr wrap="square" lIns="25400" tIns="12700" rIns="25400" bIns="12700" anchor="t">
             <a:spAutoFit/>
           </a:bodyPr>
           <a:lstStyle/>
@@ -15115,6 +15298,7 @@
           <a:lstStyle/>
           <a:p>
             <a:pPr algn="ctr"/>
+            <a:endParaRPr/>
           </a:p>
         </p:txBody>
       </p:sp>
@@ -15135,7 +15319,7 @@
           <a:noFill/>
         </p:spPr>
         <p:txBody>
-          <a:bodyPr wrap="square" anchor="t" lIns="25400" rIns="25400" tIns="12700" bIns="12700">
+          <a:bodyPr wrap="square" lIns="25400" tIns="12700" rIns="25400" bIns="12700" anchor="t">
             <a:spAutoFit/>
           </a:bodyPr>
           <a:lstStyle/>
@@ -15171,7 +15355,7 @@
           <a:noFill/>
         </p:spPr>
         <p:txBody>
-          <a:bodyPr wrap="square" anchor="t" lIns="25400" rIns="25400" tIns="12700" bIns="12700">
+          <a:bodyPr wrap="square" lIns="25400" tIns="12700" rIns="25400" bIns="12700" anchor="t">
             <a:spAutoFit/>
           </a:bodyPr>
           <a:lstStyle/>
@@ -15207,7 +15391,7 @@
           <a:noFill/>
         </p:spPr>
         <p:txBody>
-          <a:bodyPr wrap="square" anchor="t" lIns="25400" rIns="25400" tIns="12700" bIns="12700">
+          <a:bodyPr wrap="square" lIns="25400" tIns="12700" rIns="25400" bIns="12700" anchor="t">
             <a:spAutoFit/>
           </a:bodyPr>
           <a:lstStyle/>
@@ -15269,6 +15453,7 @@
           <a:lstStyle/>
           <a:p>
             <a:pPr algn="ctr"/>
+            <a:endParaRPr/>
           </a:p>
         </p:txBody>
       </p:sp>
@@ -15289,7 +15474,7 @@
           <a:noFill/>
         </p:spPr>
         <p:txBody>
-          <a:bodyPr wrap="square" anchor="t" lIns="25400" rIns="25400" tIns="12700" bIns="12700">
+          <a:bodyPr wrap="square" lIns="25400" tIns="12700" rIns="25400" bIns="12700" anchor="t">
             <a:spAutoFit/>
           </a:bodyPr>
           <a:lstStyle/>
@@ -15325,7 +15510,7 @@
           <a:noFill/>
         </p:spPr>
         <p:txBody>
-          <a:bodyPr wrap="square" anchor="t" lIns="25400" rIns="25400" tIns="12700" bIns="12700">
+          <a:bodyPr wrap="square" lIns="25400" tIns="12700" rIns="25400" bIns="12700" anchor="t">
             <a:spAutoFit/>
           </a:bodyPr>
           <a:lstStyle/>
@@ -15361,7 +15546,7 @@
           <a:noFill/>
         </p:spPr>
         <p:txBody>
-          <a:bodyPr wrap="square" anchor="t" lIns="25400" rIns="25400" tIns="12700" bIns="12700">
+          <a:bodyPr wrap="square" lIns="25400" tIns="12700" rIns="25400" bIns="12700" anchor="t">
             <a:spAutoFit/>
           </a:bodyPr>
           <a:lstStyle/>
@@ -15423,6 +15608,7 @@
           <a:lstStyle/>
           <a:p>
             <a:pPr algn="ctr"/>
+            <a:endParaRPr/>
           </a:p>
         </p:txBody>
       </p:sp>
@@ -15443,7 +15629,7 @@
           <a:noFill/>
         </p:spPr>
         <p:txBody>
-          <a:bodyPr wrap="square" anchor="t" lIns="25400" rIns="25400" tIns="12700" bIns="12700">
+          <a:bodyPr wrap="square" lIns="25400" tIns="12700" rIns="25400" bIns="12700" anchor="t">
             <a:spAutoFit/>
           </a:bodyPr>
           <a:lstStyle/>
@@ -15479,7 +15665,7 @@
           <a:noFill/>
         </p:spPr>
         <p:txBody>
-          <a:bodyPr wrap="square" anchor="t" lIns="25400" rIns="25400" tIns="12700" bIns="12700">
+          <a:bodyPr wrap="square" lIns="25400" tIns="12700" rIns="25400" bIns="12700" anchor="t">
             <a:spAutoFit/>
           </a:bodyPr>
           <a:lstStyle/>
@@ -15515,7 +15701,7 @@
           <a:noFill/>
         </p:spPr>
         <p:txBody>
-          <a:bodyPr wrap="square" anchor="t" lIns="25400" rIns="25400" tIns="12700" bIns="12700">
+          <a:bodyPr wrap="square" lIns="25400" tIns="12700" rIns="25400" bIns="12700" anchor="t">
             <a:spAutoFit/>
           </a:bodyPr>
           <a:lstStyle/>
@@ -15577,6 +15763,7 @@
           <a:lstStyle/>
           <a:p>
             <a:pPr algn="ctr"/>
+            <a:endParaRPr/>
           </a:p>
         </p:txBody>
       </p:sp>
@@ -15597,7 +15784,7 @@
           <a:noFill/>
         </p:spPr>
         <p:txBody>
-          <a:bodyPr wrap="square" anchor="t" lIns="25400" rIns="25400" tIns="12700" bIns="12700">
+          <a:bodyPr wrap="square" lIns="25400" tIns="12700" rIns="25400" bIns="12700" anchor="t">
             <a:spAutoFit/>
           </a:bodyPr>
           <a:lstStyle/>
@@ -15633,7 +15820,7 @@
           <a:noFill/>
         </p:spPr>
         <p:txBody>
-          <a:bodyPr wrap="square" anchor="t" lIns="25400" rIns="25400" tIns="12700" bIns="12700">
+          <a:bodyPr wrap="square" lIns="25400" tIns="12700" rIns="25400" bIns="12700" anchor="t">
             <a:spAutoFit/>
           </a:bodyPr>
           <a:lstStyle/>
@@ -15669,7 +15856,7 @@
           <a:noFill/>
         </p:spPr>
         <p:txBody>
-          <a:bodyPr wrap="square" anchor="t" lIns="25400" rIns="25400" tIns="12700" bIns="12700">
+          <a:bodyPr wrap="square" lIns="25400" tIns="12700" rIns="25400" bIns="12700" anchor="t">
             <a:spAutoFit/>
           </a:bodyPr>
           <a:lstStyle/>
@@ -15731,6 +15918,7 @@
           <a:lstStyle/>
           <a:p>
             <a:pPr algn="ctr"/>
+            <a:endParaRPr/>
           </a:p>
         </p:txBody>
       </p:sp>
@@ -15751,7 +15939,7 @@
           <a:noFill/>
         </p:spPr>
         <p:txBody>
-          <a:bodyPr wrap="square" anchor="t" lIns="25400" rIns="25400" tIns="12700" bIns="12700">
+          <a:bodyPr wrap="square" lIns="25400" tIns="12700" rIns="25400" bIns="12700" anchor="t">
             <a:spAutoFit/>
           </a:bodyPr>
           <a:lstStyle/>
@@ -15787,7 +15975,7 @@
           <a:noFill/>
         </p:spPr>
         <p:txBody>
-          <a:bodyPr wrap="square" anchor="t" lIns="25400" rIns="25400" tIns="12700" bIns="12700">
+          <a:bodyPr wrap="square" lIns="25400" tIns="12700" rIns="25400" bIns="12700" anchor="t">
             <a:spAutoFit/>
           </a:bodyPr>
           <a:lstStyle/>
@@ -15823,7 +16011,7 @@
           <a:noFill/>
         </p:spPr>
         <p:txBody>
-          <a:bodyPr wrap="square" anchor="t" lIns="25400" rIns="25400" tIns="12700" bIns="12700">
+          <a:bodyPr wrap="square" lIns="25400" tIns="12700" rIns="25400" bIns="12700" anchor="t">
             <a:spAutoFit/>
           </a:bodyPr>
           <a:lstStyle/>
@@ -15885,6 +16073,7 @@
           <a:lstStyle/>
           <a:p>
             <a:pPr algn="ctr"/>
+            <a:endParaRPr/>
           </a:p>
         </p:txBody>
       </p:sp>
@@ -15905,7 +16094,7 @@
           <a:noFill/>
         </p:spPr>
         <p:txBody>
-          <a:bodyPr wrap="square" anchor="t" lIns="25400" rIns="25400" tIns="12700" bIns="12700">
+          <a:bodyPr wrap="square" lIns="25400" tIns="12700" rIns="25400" bIns="12700" anchor="t">
             <a:spAutoFit/>
           </a:bodyPr>
           <a:lstStyle/>
@@ -15941,7 +16130,7 @@
           <a:noFill/>
         </p:spPr>
         <p:txBody>
-          <a:bodyPr wrap="square" anchor="t" lIns="25400" rIns="25400" tIns="12700" bIns="12700">
+          <a:bodyPr wrap="square" lIns="25400" tIns="12700" rIns="25400" bIns="12700" anchor="t">
             <a:spAutoFit/>
           </a:bodyPr>
           <a:lstStyle/>
@@ -15977,7 +16166,7 @@
           <a:noFill/>
         </p:spPr>
         <p:txBody>
-          <a:bodyPr wrap="square" anchor="t" lIns="25400" rIns="25400" tIns="12700" bIns="12700">
+          <a:bodyPr wrap="square" lIns="25400" tIns="12700" rIns="25400" bIns="12700" anchor="t">
             <a:spAutoFit/>
           </a:bodyPr>
           <a:lstStyle/>
@@ -16039,6 +16228,7 @@
           <a:lstStyle/>
           <a:p>
             <a:pPr algn="ctr"/>
+            <a:endParaRPr/>
           </a:p>
         </p:txBody>
       </p:sp>
@@ -16059,7 +16249,7 @@
           <a:noFill/>
         </p:spPr>
         <p:txBody>
-          <a:bodyPr wrap="square" anchor="t" lIns="25400" rIns="25400" tIns="12700" bIns="12700">
+          <a:bodyPr wrap="square" lIns="25400" tIns="12700" rIns="25400" bIns="12700" anchor="t">
             <a:spAutoFit/>
           </a:bodyPr>
           <a:lstStyle/>
@@ -16095,7 +16285,7 @@
           <a:noFill/>
         </p:spPr>
         <p:txBody>
-          <a:bodyPr wrap="square" anchor="t" lIns="25400" rIns="25400" tIns="12700" bIns="12700">
+          <a:bodyPr wrap="square" lIns="25400" tIns="12700" rIns="25400" bIns="12700" anchor="t">
             <a:spAutoFit/>
           </a:bodyPr>
           <a:lstStyle/>
@@ -16131,7 +16321,7 @@
           <a:noFill/>
         </p:spPr>
         <p:txBody>
-          <a:bodyPr wrap="square" anchor="t" lIns="25400" rIns="25400" tIns="12700" bIns="12700">
+          <a:bodyPr wrap="square" lIns="25400" tIns="12700" rIns="25400" bIns="12700" anchor="t">
             <a:spAutoFit/>
           </a:bodyPr>
           <a:lstStyle/>
@@ -16191,6 +16381,7 @@
           <a:lstStyle/>
           <a:p>
             <a:pPr algn="ctr"/>
+            <a:endParaRPr/>
           </a:p>
         </p:txBody>
       </p:sp>
@@ -16235,6 +16426,7 @@
           <a:lstStyle/>
           <a:p>
             <a:pPr algn="ctr"/>
+            <a:endParaRPr/>
           </a:p>
         </p:txBody>
       </p:sp>
@@ -16255,7 +16447,7 @@
           <a:noFill/>
         </p:spPr>
         <p:txBody>
-          <a:bodyPr wrap="square" anchor="t" lIns="25400" rIns="25400" tIns="12700" bIns="12700">
+          <a:bodyPr wrap="square" lIns="25400" tIns="12700" rIns="25400" bIns="12700" anchor="t">
             <a:spAutoFit/>
           </a:bodyPr>
           <a:lstStyle/>
@@ -16293,7 +16485,7 @@
 </file>
 
 <file path=ppt/slides/slide7.xml><?xml version="1.0" encoding="utf-8"?>
-<p:sld xmlns:a="http://schemas.openxmlformats.org/drawingml/2006/main" xmlns:p="http://schemas.openxmlformats.org/presentationml/2006/main" xmlns:r="http://schemas.openxmlformats.org/officeDocument/2006/relationships">
+<p:sld xmlns:a="http://schemas.openxmlformats.org/drawingml/2006/main" xmlns:r="http://schemas.openxmlformats.org/officeDocument/2006/relationships" xmlns:p="http://schemas.openxmlformats.org/presentationml/2006/main">
   <p:cSld>
     <p:spTree>
       <p:nvGrpSpPr>
@@ -16301,7 +16493,14 @@
         <p:cNvGrpSpPr/>
         <p:nvPr/>
       </p:nvGrpSpPr>
-      <p:grpSpPr/>
+      <p:grpSpPr>
+        <a:xfrm>
+          <a:off x="0" y="0"/>
+          <a:ext cx="0" cy="0"/>
+          <a:chOff x="0" y="0"/>
+          <a:chExt cx="0" cy="0"/>
+        </a:xfrm>
+      </p:grpSpPr>
       <p:sp>
         <p:nvSpPr>
           <p:cNvPr id="2" name="Rectangle 1"/>
@@ -16343,6 +16542,7 @@
           <a:lstStyle/>
           <a:p>
             <a:pPr algn="ctr"/>
+            <a:endParaRPr/>
           </a:p>
         </p:txBody>
       </p:sp>
@@ -16387,6 +16587,7 @@
           <a:lstStyle/>
           <a:p>
             <a:pPr algn="ctr"/>
+            <a:endParaRPr/>
           </a:p>
         </p:txBody>
       </p:sp>
@@ -16407,7 +16608,7 @@
           <a:noFill/>
         </p:spPr>
         <p:txBody>
-          <a:bodyPr wrap="square" anchor="t" lIns="25400" rIns="25400" tIns="12700" bIns="12700">
+          <a:bodyPr wrap="square" lIns="25400" tIns="12700" rIns="25400" bIns="12700" anchor="t">
             <a:spAutoFit/>
           </a:bodyPr>
           <a:lstStyle/>
@@ -16467,6 +16668,7 @@
           <a:lstStyle/>
           <a:p>
             <a:pPr algn="ctr"/>
+            <a:endParaRPr/>
           </a:p>
         </p:txBody>
       </p:sp>
@@ -16487,7 +16689,7 @@
           <a:noFill/>
         </p:spPr>
         <p:txBody>
-          <a:bodyPr wrap="square" anchor="t" lIns="25400" rIns="25400" tIns="12700" bIns="12700">
+          <a:bodyPr wrap="square" lIns="25400" tIns="12700" rIns="25400" bIns="12700" anchor="t">
             <a:spAutoFit/>
           </a:bodyPr>
           <a:lstStyle/>
@@ -16543,7 +16745,7 @@
           </a:fontRef>
         </p:style>
         <p:txBody>
-          <a:bodyPr rtlCol="0" anchor="ctr" wrap="square" lIns="38100" rIns="38100" tIns="0" bIns="0"/>
+          <a:bodyPr wrap="square" lIns="38100" tIns="0" rIns="38100" bIns="0" rtlCol="0" anchor="ctr"/>
           <a:lstStyle/>
           <a:p>
             <a:pPr algn="ctr"/>
@@ -16597,7 +16799,7 @@
           </a:fontRef>
         </p:style>
         <p:txBody>
-          <a:bodyPr rtlCol="0" anchor="ctr" wrap="square" lIns="38100" rIns="38100" tIns="0" bIns="0"/>
+          <a:bodyPr wrap="square" lIns="38100" tIns="0" rIns="38100" bIns="0" rtlCol="0" anchor="ctr"/>
           <a:lstStyle/>
           <a:p>
             <a:pPr algn="ctr"/>
@@ -16651,7 +16853,7 @@
           </a:fontRef>
         </p:style>
         <p:txBody>
-          <a:bodyPr rtlCol="0" anchor="ctr" wrap="square" lIns="38100" rIns="38100" tIns="0" bIns="0"/>
+          <a:bodyPr wrap="square" lIns="38100" tIns="0" rIns="38100" bIns="0" rtlCol="0" anchor="ctr"/>
           <a:lstStyle/>
           <a:p>
             <a:pPr algn="ctr"/>
@@ -16685,7 +16887,7 @@
           <a:noFill/>
         </p:spPr>
         <p:txBody>
-          <a:bodyPr wrap="square" anchor="t" lIns="25400" rIns="25400" tIns="12700" bIns="12700">
+          <a:bodyPr wrap="square" lIns="25400" tIns="12700" rIns="25400" bIns="12700" anchor="t">
             <a:spAutoFit/>
           </a:bodyPr>
           <a:lstStyle/>
@@ -16721,7 +16923,7 @@
           <a:noFill/>
         </p:spPr>
         <p:txBody>
-          <a:bodyPr wrap="square" anchor="t" lIns="25400" rIns="25400" tIns="12700" bIns="12700">
+          <a:bodyPr wrap="square" lIns="25400" tIns="12700" rIns="25400" bIns="12700" anchor="t">
             <a:spAutoFit/>
           </a:bodyPr>
           <a:lstStyle/>
@@ -16783,6 +16985,7 @@
           <a:lstStyle/>
           <a:p>
             <a:pPr algn="ctr"/>
+            <a:endParaRPr/>
           </a:p>
         </p:txBody>
       </p:sp>
@@ -16827,6 +17030,7 @@
           <a:lstStyle/>
           <a:p>
             <a:pPr algn="ctr"/>
+            <a:endParaRPr/>
           </a:p>
         </p:txBody>
       </p:sp>
@@ -16847,7 +17051,7 @@
           <a:noFill/>
         </p:spPr>
         <p:txBody>
-          <a:bodyPr wrap="square" anchor="t" lIns="25400" rIns="25400" tIns="12700" bIns="12700">
+          <a:bodyPr wrap="square" lIns="25400" tIns="12700" rIns="25400" bIns="12700" anchor="t">
             <a:spAutoFit/>
           </a:bodyPr>
           <a:lstStyle/>
@@ -16907,6 +17111,7 @@
           <a:lstStyle/>
           <a:p>
             <a:pPr algn="ctr"/>
+            <a:endParaRPr/>
           </a:p>
         </p:txBody>
       </p:sp>
@@ -16927,7 +17132,7 @@
           <a:noFill/>
         </p:spPr>
         <p:txBody>
-          <a:bodyPr wrap="square" anchor="t" lIns="25400" rIns="25400" tIns="12700" bIns="12700">
+          <a:bodyPr wrap="square" lIns="25400" tIns="12700" rIns="25400" bIns="12700" anchor="t">
             <a:spAutoFit/>
           </a:bodyPr>
           <a:lstStyle/>
@@ -16991,6 +17196,7 @@
           <a:lstStyle/>
           <a:p>
             <a:pPr algn="ctr"/>
+            <a:endParaRPr/>
           </a:p>
         </p:txBody>
       </p:sp>
@@ -17011,7 +17217,7 @@
           <a:noFill/>
         </p:spPr>
         <p:txBody>
-          <a:bodyPr wrap="square" anchor="t" lIns="25400" rIns="25400" tIns="12700" bIns="12700">
+          <a:bodyPr wrap="square" lIns="25400" tIns="12700" rIns="25400" bIns="12700" anchor="t">
             <a:spAutoFit/>
           </a:bodyPr>
           <a:lstStyle/>
@@ -17075,6 +17281,7 @@
           <a:lstStyle/>
           <a:p>
             <a:pPr algn="ctr"/>
+            <a:endParaRPr/>
           </a:p>
         </p:txBody>
       </p:sp>
@@ -17095,7 +17302,7 @@
           <a:noFill/>
         </p:spPr>
         <p:txBody>
-          <a:bodyPr wrap="square" anchor="t" lIns="25400" rIns="25400" tIns="12700" bIns="12700">
+          <a:bodyPr wrap="square" lIns="25400" tIns="12700" rIns="25400" bIns="12700" anchor="t">
             <a:spAutoFit/>
           </a:bodyPr>
           <a:lstStyle/>
@@ -17159,6 +17366,7 @@
           <a:lstStyle/>
           <a:p>
             <a:pPr algn="ctr"/>
+            <a:endParaRPr/>
           </a:p>
         </p:txBody>
       </p:sp>
@@ -17179,7 +17387,7 @@
           <a:noFill/>
         </p:spPr>
         <p:txBody>
-          <a:bodyPr wrap="square" anchor="t" lIns="25400" rIns="25400" tIns="12700" bIns="12700">
+          <a:bodyPr wrap="square" lIns="25400" tIns="12700" rIns="25400" bIns="12700" anchor="t">
             <a:spAutoFit/>
           </a:bodyPr>
           <a:lstStyle/>
@@ -17243,6 +17451,7 @@
           <a:lstStyle/>
           <a:p>
             <a:pPr algn="ctr"/>
+            <a:endParaRPr/>
           </a:p>
         </p:txBody>
       </p:sp>
@@ -17263,7 +17472,7 @@
           <a:noFill/>
         </p:spPr>
         <p:txBody>
-          <a:bodyPr wrap="square" anchor="t" lIns="25400" rIns="25400" tIns="12700" bIns="12700">
+          <a:bodyPr wrap="square" lIns="25400" tIns="12700" rIns="25400" bIns="12700" anchor="t">
             <a:spAutoFit/>
           </a:bodyPr>
           <a:lstStyle/>
@@ -17327,6 +17536,7 @@
           <a:lstStyle/>
           <a:p>
             <a:pPr algn="ctr"/>
+            <a:endParaRPr/>
           </a:p>
         </p:txBody>
       </p:sp>
@@ -17347,7 +17557,7 @@
           <a:noFill/>
         </p:spPr>
         <p:txBody>
-          <a:bodyPr wrap="square" anchor="t" lIns="25400" rIns="25400" tIns="12700" bIns="12700">
+          <a:bodyPr wrap="square" lIns="25400" tIns="12700" rIns="25400" bIns="12700" anchor="t">
             <a:spAutoFit/>
           </a:bodyPr>
           <a:lstStyle/>
@@ -17413,6 +17623,7 @@
           <a:lstStyle/>
           <a:p>
             <a:pPr algn="ctr"/>
+            <a:endParaRPr/>
           </a:p>
         </p:txBody>
       </p:sp>
@@ -17457,6 +17668,7 @@
           <a:lstStyle/>
           <a:p>
             <a:pPr algn="ctr"/>
+            <a:endParaRPr/>
           </a:p>
         </p:txBody>
       </p:sp>
@@ -17477,7 +17689,7 @@
           <a:noFill/>
         </p:spPr>
         <p:txBody>
-          <a:bodyPr wrap="square" anchor="t" lIns="25400" rIns="25400" tIns="12700" bIns="12700">
+          <a:bodyPr wrap="square" lIns="25400" tIns="12700" rIns="25400" bIns="12700" anchor="t">
             <a:spAutoFit/>
           </a:bodyPr>
           <a:lstStyle/>
@@ -17537,6 +17749,7 @@
           <a:lstStyle/>
           <a:p>
             <a:pPr algn="ctr"/>
+            <a:endParaRPr/>
           </a:p>
         </p:txBody>
       </p:sp>
@@ -17557,7 +17770,7 @@
           <a:noFill/>
         </p:spPr>
         <p:txBody>
-          <a:bodyPr wrap="square" anchor="t" lIns="25400" rIns="25400" tIns="12700" bIns="12700">
+          <a:bodyPr wrap="square" lIns="25400" tIns="12700" rIns="25400" bIns="12700" anchor="t">
             <a:spAutoFit/>
           </a:bodyPr>
           <a:lstStyle/>
@@ -17631,6 +17844,7 @@
           <a:lstStyle/>
           <a:p>
             <a:pPr algn="ctr"/>
+            <a:endParaRPr/>
           </a:p>
         </p:txBody>
       </p:sp>
@@ -17651,7 +17865,7 @@
           <a:noFill/>
         </p:spPr>
         <p:txBody>
-          <a:bodyPr wrap="square" anchor="t" lIns="25400" rIns="25400" tIns="12700" bIns="12700">
+          <a:bodyPr wrap="square" lIns="25400" tIns="12700" rIns="25400" bIns="12700" anchor="t">
             <a:spAutoFit/>
           </a:bodyPr>
           <a:lstStyle/>
@@ -17725,6 +17939,7 @@
           <a:lstStyle/>
           <a:p>
             <a:pPr algn="ctr"/>
+            <a:endParaRPr/>
           </a:p>
         </p:txBody>
       </p:sp>
@@ -17745,7 +17960,7 @@
           <a:noFill/>
         </p:spPr>
         <p:txBody>
-          <a:bodyPr wrap="square" anchor="t" lIns="25400" rIns="25400" tIns="12700" bIns="12700">
+          <a:bodyPr wrap="square" lIns="25400" tIns="12700" rIns="25400" bIns="12700" anchor="t">
             <a:spAutoFit/>
           </a:bodyPr>
           <a:lstStyle/>
@@ -17819,6 +18034,7 @@
           <a:lstStyle/>
           <a:p>
             <a:pPr algn="ctr"/>
+            <a:endParaRPr/>
           </a:p>
         </p:txBody>
       </p:sp>
@@ -17839,7 +18055,7 @@
           <a:noFill/>
         </p:spPr>
         <p:txBody>
-          <a:bodyPr wrap="square" anchor="t" lIns="25400" rIns="25400" tIns="12700" bIns="12700">
+          <a:bodyPr wrap="square" lIns="25400" tIns="12700" rIns="25400" bIns="12700" anchor="t">
             <a:spAutoFit/>
           </a:bodyPr>
           <a:lstStyle/>
@@ -17915,6 +18131,7 @@
           <a:lstStyle/>
           <a:p>
             <a:pPr algn="ctr"/>
+            <a:endParaRPr/>
           </a:p>
         </p:txBody>
       </p:sp>
@@ -17935,7 +18152,7 @@
           <a:noFill/>
         </p:spPr>
         <p:txBody>
-          <a:bodyPr wrap="square" anchor="t" lIns="25400" rIns="25400" tIns="12700" bIns="12700">
+          <a:bodyPr wrap="square" lIns="25400" tIns="12700" rIns="25400" bIns="12700" anchor="t">
             <a:spAutoFit/>
           </a:bodyPr>
           <a:lstStyle/>
@@ -17971,7 +18188,7 @@
           <a:noFill/>
         </p:spPr>
         <p:txBody>
-          <a:bodyPr wrap="square" anchor="t" lIns="25400" rIns="25400" tIns="12700" bIns="12700">
+          <a:bodyPr wrap="square" lIns="25400" tIns="12700" rIns="25400" bIns="12700" anchor="t">
             <a:spAutoFit/>
           </a:bodyPr>
           <a:lstStyle/>
@@ -18031,6 +18248,7 @@
           <a:lstStyle/>
           <a:p>
             <a:pPr algn="ctr"/>
+            <a:endParaRPr/>
           </a:p>
         </p:txBody>
       </p:sp>
@@ -18071,7 +18289,7 @@
           </a:fontRef>
         </p:style>
         <p:txBody>
-          <a:bodyPr rtlCol="0" anchor="ctr" wrap="square" lIns="38100" rIns="38100" tIns="0" bIns="0"/>
+          <a:bodyPr wrap="square" lIns="38100" tIns="0" rIns="38100" bIns="0" rtlCol="0" anchor="ctr"/>
           <a:lstStyle/>
           <a:p>
             <a:pPr algn="ctr"/>
@@ -18105,7 +18323,7 @@
           <a:noFill/>
         </p:spPr>
         <p:txBody>
-          <a:bodyPr wrap="square" anchor="t" lIns="25400" rIns="25400" tIns="12700" bIns="12700">
+          <a:bodyPr wrap="square" lIns="25400" tIns="12700" rIns="25400" bIns="12700" anchor="t">
             <a:spAutoFit/>
           </a:bodyPr>
           <a:lstStyle/>
@@ -18165,6 +18383,7 @@
           <a:lstStyle/>
           <a:p>
             <a:pPr algn="ctr"/>
+            <a:endParaRPr/>
           </a:p>
         </p:txBody>
       </p:sp>
@@ -18209,6 +18428,7 @@
           <a:lstStyle/>
           <a:p>
             <a:pPr algn="ctr"/>
+            <a:endParaRPr/>
           </a:p>
         </p:txBody>
       </p:sp>
@@ -18229,7 +18449,7 @@
           <a:noFill/>
         </p:spPr>
         <p:txBody>
-          <a:bodyPr wrap="square" anchor="t" lIns="25400" rIns="25400" tIns="12700" bIns="12700">
+          <a:bodyPr wrap="square" lIns="25400" tIns="12700" rIns="25400" bIns="12700" anchor="t">
             <a:spAutoFit/>
           </a:bodyPr>
           <a:lstStyle/>
@@ -18265,7 +18485,7 @@
           <a:noFill/>
         </p:spPr>
         <p:txBody>
-          <a:bodyPr wrap="square" anchor="t" lIns="25400" rIns="25400" tIns="12700" bIns="12700">
+          <a:bodyPr wrap="square" lIns="25400" tIns="12700" rIns="25400" bIns="12700" anchor="t">
             <a:spAutoFit/>
           </a:bodyPr>
           <a:lstStyle/>
@@ -18293,7 +18513,7 @@
 </file>
 
 <file path=ppt/slides/slide8.xml><?xml version="1.0" encoding="utf-8"?>
-<p:sld xmlns:a="http://schemas.openxmlformats.org/drawingml/2006/main" xmlns:p="http://schemas.openxmlformats.org/presentationml/2006/main" xmlns:r="http://schemas.openxmlformats.org/officeDocument/2006/relationships">
+<p:sld xmlns:a="http://schemas.openxmlformats.org/drawingml/2006/main" xmlns:r="http://schemas.openxmlformats.org/officeDocument/2006/relationships" xmlns:p="http://schemas.openxmlformats.org/presentationml/2006/main">
   <p:cSld>
     <p:spTree>
       <p:nvGrpSpPr>
@@ -18301,7 +18521,14 @@
         <p:cNvGrpSpPr/>
         <p:nvPr/>
       </p:nvGrpSpPr>
-      <p:grpSpPr/>
+      <p:grpSpPr>
+        <a:xfrm>
+          <a:off x="0" y="0"/>
+          <a:ext cx="0" cy="0"/>
+          <a:chOff x="0" y="0"/>
+          <a:chExt cx="0" cy="0"/>
+        </a:xfrm>
+      </p:grpSpPr>
       <p:sp>
         <p:nvSpPr>
           <p:cNvPr id="2" name="Rectangle 1"/>
@@ -18343,6 +18570,7 @@
           <a:lstStyle/>
           <a:p>
             <a:pPr algn="ctr"/>
+            <a:endParaRPr/>
           </a:p>
         </p:txBody>
       </p:sp>
@@ -18387,6 +18615,7 @@
           <a:lstStyle/>
           <a:p>
             <a:pPr algn="ctr"/>
+            <a:endParaRPr/>
           </a:p>
         </p:txBody>
       </p:sp>
@@ -18407,7 +18636,7 @@
           <a:noFill/>
         </p:spPr>
         <p:txBody>
-          <a:bodyPr wrap="square" anchor="t" lIns="25400" rIns="25400" tIns="12700" bIns="12700">
+          <a:bodyPr wrap="square" lIns="25400" tIns="12700" rIns="25400" bIns="12700" anchor="t">
             <a:spAutoFit/>
           </a:bodyPr>
           <a:lstStyle/>
@@ -18467,6 +18696,7 @@
           <a:lstStyle/>
           <a:p>
             <a:pPr algn="ctr"/>
+            <a:endParaRPr/>
           </a:p>
         </p:txBody>
       </p:sp>
@@ -18487,7 +18717,7 @@
           <a:noFill/>
         </p:spPr>
         <p:txBody>
-          <a:bodyPr wrap="square" anchor="t" lIns="25400" rIns="25400" tIns="12700" bIns="12700">
+          <a:bodyPr wrap="square" lIns="25400" tIns="12700" rIns="25400" bIns="12700" anchor="t">
             <a:spAutoFit/>
           </a:bodyPr>
           <a:lstStyle/>
@@ -18543,7 +18773,7 @@
           </a:fontRef>
         </p:style>
         <p:txBody>
-          <a:bodyPr rtlCol="0" anchor="ctr" wrap="square" lIns="38100" rIns="38100" tIns="0" bIns="0"/>
+          <a:bodyPr wrap="square" lIns="38100" tIns="0" rIns="38100" bIns="0" rtlCol="0" anchor="ctr"/>
           <a:lstStyle/>
           <a:p>
             <a:pPr algn="ctr"/>
@@ -18597,7 +18827,7 @@
           </a:fontRef>
         </p:style>
         <p:txBody>
-          <a:bodyPr rtlCol="0" anchor="ctr" wrap="square" lIns="38100" rIns="38100" tIns="0" bIns="0"/>
+          <a:bodyPr wrap="square" lIns="38100" tIns="0" rIns="38100" bIns="0" rtlCol="0" anchor="ctr"/>
           <a:lstStyle/>
           <a:p>
             <a:pPr algn="ctr"/>
@@ -18651,7 +18881,7 @@
           </a:fontRef>
         </p:style>
         <p:txBody>
-          <a:bodyPr rtlCol="0" anchor="ctr" wrap="square" lIns="38100" rIns="38100" tIns="0" bIns="0"/>
+          <a:bodyPr wrap="square" lIns="38100" tIns="0" rIns="38100" bIns="0" rtlCol="0" anchor="ctr"/>
           <a:lstStyle/>
           <a:p>
             <a:pPr algn="ctr"/>
@@ -18685,7 +18915,7 @@
           <a:noFill/>
         </p:spPr>
         <p:txBody>
-          <a:bodyPr wrap="square" anchor="t" lIns="25400" rIns="25400" tIns="12700" bIns="12700">
+          <a:bodyPr wrap="square" lIns="25400" tIns="12700" rIns="25400" bIns="12700" anchor="t">
             <a:spAutoFit/>
           </a:bodyPr>
           <a:lstStyle/>
@@ -18721,7 +18951,7 @@
           <a:noFill/>
         </p:spPr>
         <p:txBody>
-          <a:bodyPr wrap="square" anchor="t" lIns="25400" rIns="25400" tIns="12700" bIns="12700">
+          <a:bodyPr wrap="square" lIns="25400" tIns="12700" rIns="25400" bIns="12700" anchor="t">
             <a:spAutoFit/>
           </a:bodyPr>
           <a:lstStyle/>
@@ -18783,6 +19013,7 @@
           <a:lstStyle/>
           <a:p>
             <a:pPr algn="ctr"/>
+            <a:endParaRPr/>
           </a:p>
         </p:txBody>
       </p:sp>
@@ -18827,6 +19058,7 @@
           <a:lstStyle/>
           <a:p>
             <a:pPr algn="ctr"/>
+            <a:endParaRPr/>
           </a:p>
         </p:txBody>
       </p:sp>
@@ -18847,7 +19079,7 @@
           <a:noFill/>
         </p:spPr>
         <p:txBody>
-          <a:bodyPr wrap="square" anchor="t" lIns="25400" rIns="25400" tIns="12700" bIns="12700">
+          <a:bodyPr wrap="square" lIns="25400" tIns="12700" rIns="25400" bIns="12700" anchor="t">
             <a:spAutoFit/>
           </a:bodyPr>
           <a:lstStyle/>
@@ -18883,7 +19115,7 @@
           <a:noFill/>
         </p:spPr>
         <p:txBody>
-          <a:bodyPr wrap="square" anchor="t" lIns="25400" rIns="25400" tIns="12700" bIns="12700">
+          <a:bodyPr wrap="square" lIns="25400" tIns="12700" rIns="25400" bIns="12700" anchor="t">
             <a:spAutoFit/>
           </a:bodyPr>
           <a:lstStyle/>
@@ -18919,7 +19151,7 @@
           <a:noFill/>
         </p:spPr>
         <p:txBody>
-          <a:bodyPr wrap="square" anchor="t" lIns="25400" rIns="25400" tIns="12700" bIns="12700">
+          <a:bodyPr wrap="square" lIns="25400" tIns="12700" rIns="25400" bIns="12700" anchor="t">
             <a:spAutoFit/>
           </a:bodyPr>
           <a:lstStyle/>
@@ -18959,7 +19191,7 @@
           <a:noFill/>
         </p:spPr>
         <p:txBody>
-          <a:bodyPr wrap="square" anchor="t" lIns="25400" rIns="25400" tIns="12700" bIns="12700">
+          <a:bodyPr wrap="square" lIns="25400" tIns="12700" rIns="25400" bIns="12700" anchor="t">
             <a:spAutoFit/>
           </a:bodyPr>
           <a:lstStyle/>
@@ -19021,6 +19253,7 @@
           <a:lstStyle/>
           <a:p>
             <a:pPr algn="ctr"/>
+            <a:endParaRPr/>
           </a:p>
         </p:txBody>
       </p:sp>
@@ -19065,6 +19298,7 @@
           <a:lstStyle/>
           <a:p>
             <a:pPr algn="ctr"/>
+            <a:endParaRPr/>
           </a:p>
         </p:txBody>
       </p:sp>
@@ -19085,7 +19319,7 @@
           <a:noFill/>
         </p:spPr>
         <p:txBody>
-          <a:bodyPr wrap="square" anchor="t" lIns="25400" rIns="25400" tIns="12700" bIns="12700">
+          <a:bodyPr wrap="square" lIns="25400" tIns="12700" rIns="25400" bIns="12700" anchor="t">
             <a:spAutoFit/>
           </a:bodyPr>
           <a:lstStyle/>
@@ -19121,7 +19355,7 @@
           <a:noFill/>
         </p:spPr>
         <p:txBody>
-          <a:bodyPr wrap="square" anchor="t" lIns="25400" rIns="25400" tIns="12700" bIns="12700">
+          <a:bodyPr wrap="square" lIns="25400" tIns="12700" rIns="25400" bIns="12700" anchor="t">
             <a:spAutoFit/>
           </a:bodyPr>
           <a:lstStyle/>
@@ -19157,7 +19391,7 @@
           <a:noFill/>
         </p:spPr>
         <p:txBody>
-          <a:bodyPr wrap="square" anchor="t" lIns="25400" rIns="25400" tIns="12700" bIns="12700">
+          <a:bodyPr wrap="square" lIns="25400" tIns="12700" rIns="25400" bIns="12700" anchor="t">
             <a:spAutoFit/>
           </a:bodyPr>
           <a:lstStyle/>
@@ -19197,7 +19431,7 @@
           <a:noFill/>
         </p:spPr>
         <p:txBody>
-          <a:bodyPr wrap="square" anchor="t" lIns="25400" rIns="25400" tIns="12700" bIns="12700">
+          <a:bodyPr wrap="square" lIns="25400" tIns="12700" rIns="25400" bIns="12700" anchor="t">
             <a:spAutoFit/>
           </a:bodyPr>
           <a:lstStyle/>
@@ -19259,6 +19493,7 @@
           <a:lstStyle/>
           <a:p>
             <a:pPr algn="ctr"/>
+            <a:endParaRPr/>
           </a:p>
         </p:txBody>
       </p:sp>
@@ -19303,6 +19538,7 @@
           <a:lstStyle/>
           <a:p>
             <a:pPr algn="ctr"/>
+            <a:endParaRPr/>
           </a:p>
         </p:txBody>
       </p:sp>
@@ -19323,7 +19559,7 @@
           <a:noFill/>
         </p:spPr>
         <p:txBody>
-          <a:bodyPr wrap="square" anchor="t" lIns="25400" rIns="25400" tIns="12700" bIns="12700">
+          <a:bodyPr wrap="square" lIns="25400" tIns="12700" rIns="25400" bIns="12700" anchor="t">
             <a:spAutoFit/>
           </a:bodyPr>
           <a:lstStyle/>
@@ -19359,7 +19595,7 @@
           <a:noFill/>
         </p:spPr>
         <p:txBody>
-          <a:bodyPr wrap="square" anchor="t" lIns="25400" rIns="25400" tIns="12700" bIns="12700">
+          <a:bodyPr wrap="square" lIns="25400" tIns="12700" rIns="25400" bIns="12700" anchor="t">
             <a:spAutoFit/>
           </a:bodyPr>
           <a:lstStyle/>
@@ -19395,7 +19631,7 @@
           <a:noFill/>
         </p:spPr>
         <p:txBody>
-          <a:bodyPr wrap="square" anchor="t" lIns="25400" rIns="25400" tIns="12700" bIns="12700">
+          <a:bodyPr wrap="square" lIns="25400" tIns="12700" rIns="25400" bIns="12700" anchor="t">
             <a:spAutoFit/>
           </a:bodyPr>
           <a:lstStyle/>
@@ -19435,7 +19671,7 @@
           <a:noFill/>
         </p:spPr>
         <p:txBody>
-          <a:bodyPr wrap="square" anchor="t" lIns="25400" rIns="25400" tIns="12700" bIns="12700">
+          <a:bodyPr wrap="square" lIns="25400" tIns="12700" rIns="25400" bIns="12700" anchor="t">
             <a:spAutoFit/>
           </a:bodyPr>
           <a:lstStyle/>
@@ -19497,6 +19733,7 @@
           <a:lstStyle/>
           <a:p>
             <a:pPr algn="ctr"/>
+            <a:endParaRPr/>
           </a:p>
         </p:txBody>
       </p:sp>
@@ -19541,6 +19778,7 @@
           <a:lstStyle/>
           <a:p>
             <a:pPr algn="ctr"/>
+            <a:endParaRPr/>
           </a:p>
         </p:txBody>
       </p:sp>
@@ -19561,7 +19799,7 @@
           <a:noFill/>
         </p:spPr>
         <p:txBody>
-          <a:bodyPr wrap="square" anchor="t" lIns="25400" rIns="25400" tIns="12700" bIns="12700">
+          <a:bodyPr wrap="square" lIns="25400" tIns="12700" rIns="25400" bIns="12700" anchor="t">
             <a:spAutoFit/>
           </a:bodyPr>
           <a:lstStyle/>
@@ -19597,7 +19835,7 @@
           <a:noFill/>
         </p:spPr>
         <p:txBody>
-          <a:bodyPr wrap="square" anchor="t" lIns="25400" rIns="25400" tIns="12700" bIns="12700">
+          <a:bodyPr wrap="square" lIns="25400" tIns="12700" rIns="25400" bIns="12700" anchor="t">
             <a:spAutoFit/>
           </a:bodyPr>
           <a:lstStyle/>
@@ -19633,7 +19871,7 @@
           <a:noFill/>
         </p:spPr>
         <p:txBody>
-          <a:bodyPr wrap="square" anchor="t" lIns="25400" rIns="25400" tIns="12700" bIns="12700">
+          <a:bodyPr wrap="square" lIns="25400" tIns="12700" rIns="25400" bIns="12700" anchor="t">
             <a:spAutoFit/>
           </a:bodyPr>
           <a:lstStyle/>
@@ -19673,7 +19911,7 @@
           <a:noFill/>
         </p:spPr>
         <p:txBody>
-          <a:bodyPr wrap="square" anchor="t" lIns="25400" rIns="25400" tIns="12700" bIns="12700">
+          <a:bodyPr wrap="square" lIns="25400" tIns="12700" rIns="25400" bIns="12700" anchor="t">
             <a:spAutoFit/>
           </a:bodyPr>
           <a:lstStyle/>
@@ -19735,6 +19973,7 @@
           <a:lstStyle/>
           <a:p>
             <a:pPr algn="ctr"/>
+            <a:endParaRPr/>
           </a:p>
         </p:txBody>
       </p:sp>
@@ -19779,6 +20018,7 @@
           <a:lstStyle/>
           <a:p>
             <a:pPr algn="ctr"/>
+            <a:endParaRPr/>
           </a:p>
         </p:txBody>
       </p:sp>
@@ -19799,7 +20039,7 @@
           <a:noFill/>
         </p:spPr>
         <p:txBody>
-          <a:bodyPr wrap="square" anchor="t" lIns="25400" rIns="25400" tIns="12700" bIns="12700">
+          <a:bodyPr wrap="square" lIns="25400" tIns="12700" rIns="25400" bIns="12700" anchor="t">
             <a:spAutoFit/>
           </a:bodyPr>
           <a:lstStyle/>
@@ -19835,7 +20075,7 @@
           <a:noFill/>
         </p:spPr>
         <p:txBody>
-          <a:bodyPr wrap="square" anchor="t" lIns="25400" rIns="25400" tIns="12700" bIns="12700">
+          <a:bodyPr wrap="square" lIns="25400" tIns="12700" rIns="25400" bIns="12700" anchor="t">
             <a:spAutoFit/>
           </a:bodyPr>
           <a:lstStyle/>
@@ -19871,7 +20111,7 @@
           <a:noFill/>
         </p:spPr>
         <p:txBody>
-          <a:bodyPr wrap="square" anchor="t" lIns="25400" rIns="25400" tIns="12700" bIns="12700">
+          <a:bodyPr wrap="square" lIns="25400" tIns="12700" rIns="25400" bIns="12700" anchor="t">
             <a:spAutoFit/>
           </a:bodyPr>
           <a:lstStyle/>
@@ -19911,7 +20151,7 @@
           <a:noFill/>
         </p:spPr>
         <p:txBody>
-          <a:bodyPr wrap="square" anchor="t" lIns="25400" rIns="25400" tIns="12700" bIns="12700">
+          <a:bodyPr wrap="square" lIns="25400" tIns="12700" rIns="25400" bIns="12700" anchor="t">
             <a:spAutoFit/>
           </a:bodyPr>
           <a:lstStyle/>
@@ -19973,6 +20213,7 @@
           <a:lstStyle/>
           <a:p>
             <a:pPr algn="ctr"/>
+            <a:endParaRPr/>
           </a:p>
         </p:txBody>
       </p:sp>
@@ -20017,6 +20258,7 @@
           <a:lstStyle/>
           <a:p>
             <a:pPr algn="ctr"/>
+            <a:endParaRPr/>
           </a:p>
         </p:txBody>
       </p:sp>
@@ -20037,7 +20279,7 @@
           <a:noFill/>
         </p:spPr>
         <p:txBody>
-          <a:bodyPr wrap="square" anchor="t" lIns="25400" rIns="25400" tIns="12700" bIns="12700">
+          <a:bodyPr wrap="square" lIns="25400" tIns="12700" rIns="25400" bIns="12700" anchor="t">
             <a:spAutoFit/>
           </a:bodyPr>
           <a:lstStyle/>
@@ -20073,7 +20315,7 @@
           <a:noFill/>
         </p:spPr>
         <p:txBody>
-          <a:bodyPr wrap="square" anchor="t" lIns="25400" rIns="25400" tIns="12700" bIns="12700">
+          <a:bodyPr wrap="square" lIns="25400" tIns="12700" rIns="25400" bIns="12700" anchor="t">
             <a:spAutoFit/>
           </a:bodyPr>
           <a:lstStyle/>
@@ -20109,7 +20351,7 @@
           <a:noFill/>
         </p:spPr>
         <p:txBody>
-          <a:bodyPr wrap="square" anchor="t" lIns="25400" rIns="25400" tIns="12700" bIns="12700">
+          <a:bodyPr wrap="square" lIns="25400" tIns="12700" rIns="25400" bIns="12700" anchor="t">
             <a:spAutoFit/>
           </a:bodyPr>
           <a:lstStyle/>
@@ -20175,6 +20417,7 @@
           <a:lstStyle/>
           <a:p>
             <a:pPr algn="ctr"/>
+            <a:endParaRPr/>
           </a:p>
         </p:txBody>
       </p:sp>
@@ -20219,6 +20462,7 @@
           <a:lstStyle/>
           <a:p>
             <a:pPr algn="ctr"/>
+            <a:endParaRPr/>
           </a:p>
         </p:txBody>
       </p:sp>
@@ -20239,7 +20483,7 @@
           <a:noFill/>
         </p:spPr>
         <p:txBody>
-          <a:bodyPr wrap="square" anchor="t" lIns="25400" rIns="25400" tIns="12700" bIns="12700">
+          <a:bodyPr wrap="square" lIns="25400" tIns="12700" rIns="25400" bIns="12700" anchor="t">
             <a:spAutoFit/>
           </a:bodyPr>
           <a:lstStyle/>
@@ -20295,7 +20539,7 @@
           </a:fontRef>
         </p:style>
         <p:txBody>
-          <a:bodyPr rtlCol="0" anchor="ctr" wrap="square" lIns="38100" rIns="38100" tIns="0" bIns="0"/>
+          <a:bodyPr wrap="square" lIns="38100" tIns="0" rIns="38100" bIns="0" rtlCol="0" anchor="ctr"/>
           <a:lstStyle/>
           <a:p>
             <a:pPr algn="ctr"/>
@@ -20329,7 +20573,7 @@
           <a:noFill/>
         </p:spPr>
         <p:txBody>
-          <a:bodyPr wrap="square" anchor="t" lIns="25400" rIns="25400" tIns="12700" bIns="12700">
+          <a:bodyPr wrap="square" lIns="25400" tIns="12700" rIns="25400" bIns="12700" anchor="t">
             <a:spAutoFit/>
           </a:bodyPr>
           <a:lstStyle/>
@@ -20395,7 +20639,7 @@
           </a:fontRef>
         </p:style>
         <p:txBody>
-          <a:bodyPr rtlCol="0" anchor="ctr" wrap="square" lIns="38100" rIns="38100" tIns="0" bIns="0"/>
+          <a:bodyPr wrap="square" lIns="38100" tIns="0" rIns="38100" bIns="0" rtlCol="0" anchor="ctr"/>
           <a:lstStyle/>
           <a:p>
             <a:pPr algn="ctr"/>
@@ -20429,7 +20673,7 @@
           <a:noFill/>
         </p:spPr>
         <p:txBody>
-          <a:bodyPr wrap="square" anchor="t" lIns="25400" rIns="25400" tIns="12700" bIns="12700">
+          <a:bodyPr wrap="square" lIns="25400" tIns="12700" rIns="25400" bIns="12700" anchor="t">
             <a:spAutoFit/>
           </a:bodyPr>
           <a:lstStyle/>
@@ -20495,7 +20739,7 @@
           </a:fontRef>
         </p:style>
         <p:txBody>
-          <a:bodyPr rtlCol="0" anchor="ctr" wrap="square" lIns="38100" rIns="38100" tIns="0" bIns="0"/>
+          <a:bodyPr wrap="square" lIns="38100" tIns="0" rIns="38100" bIns="0" rtlCol="0" anchor="ctr"/>
           <a:lstStyle/>
           <a:p>
             <a:pPr algn="ctr"/>
@@ -20529,7 +20773,7 @@
           <a:noFill/>
         </p:spPr>
         <p:txBody>
-          <a:bodyPr wrap="square" anchor="t" lIns="25400" rIns="25400" tIns="12700" bIns="12700">
+          <a:bodyPr wrap="square" lIns="25400" tIns="12700" rIns="25400" bIns="12700" anchor="t">
             <a:spAutoFit/>
           </a:bodyPr>
           <a:lstStyle/>
@@ -20601,6 +20845,7 @@
           <a:lstStyle/>
           <a:p>
             <a:pPr algn="ctr"/>
+            <a:endParaRPr/>
           </a:p>
         </p:txBody>
       </p:sp>
@@ -20645,6 +20890,7 @@
           <a:lstStyle/>
           <a:p>
             <a:pPr algn="ctr"/>
+            <a:endParaRPr/>
           </a:p>
         </p:txBody>
       </p:sp>
@@ -20665,7 +20911,7 @@
           <a:noFill/>
         </p:spPr>
         <p:txBody>
-          <a:bodyPr wrap="square" anchor="t" lIns="25400" rIns="25400" tIns="12700" bIns="12700">
+          <a:bodyPr wrap="square" lIns="25400" tIns="12700" rIns="25400" bIns="12700" anchor="t">
             <a:spAutoFit/>
           </a:bodyPr>
           <a:lstStyle/>
@@ -20725,6 +20971,7 @@
           <a:lstStyle/>
           <a:p>
             <a:pPr algn="ctr"/>
+            <a:endParaRPr/>
           </a:p>
         </p:txBody>
       </p:sp>
@@ -20745,7 +20992,7 @@
           <a:noFill/>
         </p:spPr>
         <p:txBody>
-          <a:bodyPr wrap="square" anchor="t" lIns="25400" rIns="25400" tIns="12700" bIns="12700">
+          <a:bodyPr wrap="square" lIns="25400" tIns="12700" rIns="25400" bIns="12700" anchor="t">
             <a:spAutoFit/>
           </a:bodyPr>
           <a:lstStyle/>
@@ -20809,6 +21056,7 @@
           <a:lstStyle/>
           <a:p>
             <a:pPr algn="ctr"/>
+            <a:endParaRPr/>
           </a:p>
         </p:txBody>
       </p:sp>
@@ -20829,7 +21077,7 @@
           <a:noFill/>
         </p:spPr>
         <p:txBody>
-          <a:bodyPr wrap="square" anchor="t" lIns="25400" rIns="25400" tIns="12700" bIns="12700">
+          <a:bodyPr wrap="square" lIns="25400" tIns="12700" rIns="25400" bIns="12700" anchor="t">
             <a:spAutoFit/>
           </a:bodyPr>
           <a:lstStyle/>
@@ -20893,6 +21141,7 @@
           <a:lstStyle/>
           <a:p>
             <a:pPr algn="ctr"/>
+            <a:endParaRPr/>
           </a:p>
         </p:txBody>
       </p:sp>
@@ -20913,7 +21162,7 @@
           <a:noFill/>
         </p:spPr>
         <p:txBody>
-          <a:bodyPr wrap="square" anchor="t" lIns="25400" rIns="25400" tIns="12700" bIns="12700">
+          <a:bodyPr wrap="square" lIns="25400" tIns="12700" rIns="25400" bIns="12700" anchor="t">
             <a:spAutoFit/>
           </a:bodyPr>
           <a:lstStyle/>
@@ -20977,6 +21226,7 @@
           <a:lstStyle/>
           <a:p>
             <a:pPr algn="ctr"/>
+            <a:endParaRPr/>
           </a:p>
         </p:txBody>
       </p:sp>
@@ -20997,7 +21247,7 @@
           <a:noFill/>
         </p:spPr>
         <p:txBody>
-          <a:bodyPr wrap="square" anchor="t" lIns="25400" rIns="25400" tIns="12700" bIns="12700">
+          <a:bodyPr wrap="square" lIns="25400" tIns="12700" rIns="25400" bIns="12700" anchor="t">
             <a:spAutoFit/>
           </a:bodyPr>
           <a:lstStyle/>
@@ -21061,6 +21311,7 @@
           <a:lstStyle/>
           <a:p>
             <a:pPr algn="ctr"/>
+            <a:endParaRPr/>
           </a:p>
         </p:txBody>
       </p:sp>
@@ -21105,6 +21356,7 @@
           <a:lstStyle/>
           <a:p>
             <a:pPr algn="ctr"/>
+            <a:endParaRPr/>
           </a:p>
         </p:txBody>
       </p:sp>
@@ -21125,7 +21377,7 @@
           <a:noFill/>
         </p:spPr>
         <p:txBody>
-          <a:bodyPr wrap="square" anchor="t" lIns="25400" rIns="25400" tIns="12700" bIns="12700">
+          <a:bodyPr wrap="square" lIns="25400" tIns="12700" rIns="25400" bIns="12700" anchor="t">
             <a:spAutoFit/>
           </a:bodyPr>
           <a:lstStyle/>
@@ -21163,7 +21415,7 @@
 </file>
 
 <file path=ppt/slides/slide9.xml><?xml version="1.0" encoding="utf-8"?>
-<p:sld xmlns:a="http://schemas.openxmlformats.org/drawingml/2006/main" xmlns:p="http://schemas.openxmlformats.org/presentationml/2006/main" xmlns:r="http://schemas.openxmlformats.org/officeDocument/2006/relationships">
+<p:sld xmlns:a="http://schemas.openxmlformats.org/drawingml/2006/main" xmlns:r="http://schemas.openxmlformats.org/officeDocument/2006/relationships" xmlns:p="http://schemas.openxmlformats.org/presentationml/2006/main">
   <p:cSld>
     <p:spTree>
       <p:nvGrpSpPr>
@@ -21171,7 +21423,14 @@
         <p:cNvGrpSpPr/>
         <p:nvPr/>
       </p:nvGrpSpPr>
-      <p:grpSpPr/>
+      <p:grpSpPr>
+        <a:xfrm>
+          <a:off x="0" y="0"/>
+          <a:ext cx="0" cy="0"/>
+          <a:chOff x="0" y="0"/>
+          <a:chExt cx="0" cy="0"/>
+        </a:xfrm>
+      </p:grpSpPr>
       <p:sp>
         <p:nvSpPr>
           <p:cNvPr id="2" name="Rectangle 1"/>
@@ -21213,6 +21472,7 @@
           <a:lstStyle/>
           <a:p>
             <a:pPr algn="ctr"/>
+            <a:endParaRPr/>
           </a:p>
         </p:txBody>
       </p:sp>
@@ -21257,6 +21517,7 @@
           <a:lstStyle/>
           <a:p>
             <a:pPr algn="ctr"/>
+            <a:endParaRPr/>
           </a:p>
         </p:txBody>
       </p:sp>
@@ -21277,7 +21538,7 @@
           <a:noFill/>
         </p:spPr>
         <p:txBody>
-          <a:bodyPr wrap="square" anchor="t" lIns="25400" rIns="25400" tIns="12700" bIns="12700">
+          <a:bodyPr wrap="square" lIns="25400" tIns="12700" rIns="25400" bIns="12700" anchor="t">
             <a:spAutoFit/>
           </a:bodyPr>
           <a:lstStyle/>
@@ -21337,6 +21598,7 @@
           <a:lstStyle/>
           <a:p>
             <a:pPr algn="ctr"/>
+            <a:endParaRPr/>
           </a:p>
         </p:txBody>
       </p:sp>
@@ -21357,7 +21619,7 @@
           <a:noFill/>
         </p:spPr>
         <p:txBody>
-          <a:bodyPr wrap="square" anchor="t" lIns="25400" rIns="25400" tIns="12700" bIns="12700">
+          <a:bodyPr wrap="square" lIns="25400" tIns="12700" rIns="25400" bIns="12700" anchor="t">
             <a:spAutoFit/>
           </a:bodyPr>
           <a:lstStyle/>
@@ -21413,7 +21675,7 @@
           </a:fontRef>
         </p:style>
         <p:txBody>
-          <a:bodyPr rtlCol="0" anchor="ctr" wrap="square" lIns="38100" rIns="38100" tIns="0" bIns="0"/>
+          <a:bodyPr wrap="square" lIns="38100" tIns="0" rIns="38100" bIns="0" rtlCol="0" anchor="ctr"/>
           <a:lstStyle/>
           <a:p>
             <a:pPr algn="ctr"/>
@@ -21467,7 +21729,7 @@
           </a:fontRef>
         </p:style>
         <p:txBody>
-          <a:bodyPr rtlCol="0" anchor="ctr" wrap="square" lIns="38100" rIns="38100" tIns="0" bIns="0"/>
+          <a:bodyPr wrap="square" lIns="38100" tIns="0" rIns="38100" bIns="0" rtlCol="0" anchor="ctr"/>
           <a:lstStyle/>
           <a:p>
             <a:pPr algn="ctr"/>
@@ -21521,7 +21783,7 @@
           </a:fontRef>
         </p:style>
         <p:txBody>
-          <a:bodyPr rtlCol="0" anchor="ctr" wrap="square" lIns="38100" rIns="38100" tIns="0" bIns="0"/>
+          <a:bodyPr wrap="square" lIns="38100" tIns="0" rIns="38100" bIns="0" rtlCol="0" anchor="ctr"/>
           <a:lstStyle/>
           <a:p>
             <a:pPr algn="ctr"/>
@@ -21555,7 +21817,7 @@
           <a:noFill/>
         </p:spPr>
         <p:txBody>
-          <a:bodyPr wrap="square" anchor="t" lIns="25400" rIns="25400" tIns="12700" bIns="12700">
+          <a:bodyPr wrap="square" lIns="25400" tIns="12700" rIns="25400" bIns="12700" anchor="t">
             <a:spAutoFit/>
           </a:bodyPr>
           <a:lstStyle/>
@@ -21591,7 +21853,7 @@
           <a:noFill/>
         </p:spPr>
         <p:txBody>
-          <a:bodyPr wrap="square" anchor="t" lIns="25400" rIns="25400" tIns="12700" bIns="12700">
+          <a:bodyPr wrap="square" lIns="25400" tIns="12700" rIns="25400" bIns="12700" anchor="t">
             <a:spAutoFit/>
           </a:bodyPr>
           <a:lstStyle/>
@@ -21653,6 +21915,7 @@
           <a:lstStyle/>
           <a:p>
             <a:pPr algn="ctr"/>
+            <a:endParaRPr/>
           </a:p>
         </p:txBody>
       </p:sp>
@@ -21697,6 +21960,7 @@
           <a:lstStyle/>
           <a:p>
             <a:pPr algn="ctr"/>
+            <a:endParaRPr/>
           </a:p>
         </p:txBody>
       </p:sp>
@@ -21717,7 +21981,7 @@
           <a:noFill/>
         </p:spPr>
         <p:txBody>
-          <a:bodyPr wrap="square" anchor="t" lIns="25400" rIns="25400" tIns="12700" bIns="12700">
+          <a:bodyPr wrap="square" lIns="25400" tIns="12700" rIns="25400" bIns="12700" anchor="t">
             <a:spAutoFit/>
           </a:bodyPr>
           <a:lstStyle/>
@@ -21753,7 +22017,7 @@
           <a:noFill/>
         </p:spPr>
         <p:txBody>
-          <a:bodyPr wrap="square" anchor="t" lIns="25400" rIns="25400" tIns="12700" bIns="12700">
+          <a:bodyPr wrap="square" lIns="25400" tIns="12700" rIns="25400" bIns="12700" anchor="t">
             <a:spAutoFit/>
           </a:bodyPr>
           <a:lstStyle/>
@@ -21789,7 +22053,7 @@
           <a:noFill/>
         </p:spPr>
         <p:txBody>
-          <a:bodyPr wrap="square" anchor="t" lIns="25400" rIns="25400" tIns="12700" bIns="12700">
+          <a:bodyPr wrap="square" lIns="25400" tIns="12700" rIns="25400" bIns="12700" anchor="t">
             <a:spAutoFit/>
           </a:bodyPr>
           <a:lstStyle/>
@@ -21889,6 +22153,7 @@
           <a:lstStyle/>
           <a:p>
             <a:pPr algn="ctr"/>
+            <a:endParaRPr/>
           </a:p>
         </p:txBody>
       </p:sp>
@@ -21933,6 +22198,7 @@
           <a:lstStyle/>
           <a:p>
             <a:pPr algn="ctr"/>
+            <a:endParaRPr/>
           </a:p>
         </p:txBody>
       </p:sp>
@@ -21953,7 +22219,7 @@
           <a:noFill/>
         </p:spPr>
         <p:txBody>
-          <a:bodyPr wrap="square" anchor="t" lIns="25400" rIns="25400" tIns="12700" bIns="12700">
+          <a:bodyPr wrap="square" lIns="25400" tIns="12700" rIns="25400" bIns="12700" anchor="t">
             <a:spAutoFit/>
           </a:bodyPr>
           <a:lstStyle/>
@@ -21989,7 +22255,7 @@
           <a:noFill/>
         </p:spPr>
         <p:txBody>
-          <a:bodyPr wrap="square" anchor="t" lIns="25400" rIns="25400" tIns="12700" bIns="12700">
+          <a:bodyPr wrap="square" lIns="25400" tIns="12700" rIns="25400" bIns="12700" anchor="t">
             <a:spAutoFit/>
           </a:bodyPr>
           <a:lstStyle/>
@@ -22025,7 +22291,7 @@
           <a:noFill/>
         </p:spPr>
         <p:txBody>
-          <a:bodyPr wrap="square" anchor="t" lIns="25400" rIns="25400" tIns="12700" bIns="12700">
+          <a:bodyPr wrap="square" lIns="25400" tIns="12700" rIns="25400" bIns="12700" anchor="t">
             <a:spAutoFit/>
           </a:bodyPr>
           <a:lstStyle/>
@@ -22125,6 +22391,7 @@
           <a:lstStyle/>
           <a:p>
             <a:pPr algn="ctr"/>
+            <a:endParaRPr/>
           </a:p>
         </p:txBody>
       </p:sp>
@@ -22169,6 +22436,7 @@
           <a:lstStyle/>
           <a:p>
             <a:pPr algn="ctr"/>
+            <a:endParaRPr/>
           </a:p>
         </p:txBody>
       </p:sp>
@@ -22189,7 +22457,7 @@
           <a:noFill/>
         </p:spPr>
         <p:txBody>
-          <a:bodyPr wrap="square" anchor="t" lIns="25400" rIns="25400" tIns="12700" bIns="12700">
+          <a:bodyPr wrap="square" lIns="25400" tIns="12700" rIns="25400" bIns="12700" anchor="t">
             <a:spAutoFit/>
           </a:bodyPr>
           <a:lstStyle/>
@@ -22225,7 +22493,7 @@
           <a:noFill/>
         </p:spPr>
         <p:txBody>
-          <a:bodyPr wrap="square" anchor="t" lIns="25400" rIns="25400" tIns="12700" bIns="12700">
+          <a:bodyPr wrap="square" lIns="25400" tIns="12700" rIns="25400" bIns="12700" anchor="t">
             <a:spAutoFit/>
           </a:bodyPr>
           <a:lstStyle/>
@@ -22261,7 +22529,7 @@
           <a:noFill/>
         </p:spPr>
         <p:txBody>
-          <a:bodyPr wrap="square" anchor="t" lIns="25400" rIns="25400" tIns="12700" bIns="12700">
+          <a:bodyPr wrap="square" lIns="25400" tIns="12700" rIns="25400" bIns="12700" anchor="t">
             <a:spAutoFit/>
           </a:bodyPr>
           <a:lstStyle/>
@@ -22359,6 +22627,7 @@
           <a:lstStyle/>
           <a:p>
             <a:pPr algn="ctr"/>
+            <a:endParaRPr/>
           </a:p>
         </p:txBody>
       </p:sp>
@@ -22379,7 +22648,7 @@
           <a:noFill/>
         </p:spPr>
         <p:txBody>
-          <a:bodyPr wrap="square" anchor="t" lIns="25400" rIns="25400" tIns="12700" bIns="12700">
+          <a:bodyPr wrap="square" lIns="25400" tIns="12700" rIns="25400" bIns="12700" anchor="t">
             <a:spAutoFit/>
           </a:bodyPr>
           <a:lstStyle/>
@@ -22460,6 +22729,7 @@
           <a:lstStyle/>
           <a:p>
             <a:pPr algn="ctr"/>
+            <a:endParaRPr/>
           </a:p>
         </p:txBody>
       </p:sp>
@@ -22504,6 +22774,7 @@
           <a:lstStyle/>
           <a:p>
             <a:pPr algn="ctr"/>
+            <a:endParaRPr/>
           </a:p>
         </p:txBody>
       </p:sp>
@@ -22524,7 +22795,7 @@
           <a:noFill/>
         </p:spPr>
         <p:txBody>
-          <a:bodyPr wrap="square" anchor="t" lIns="25400" rIns="25400" tIns="12700" bIns="12700">
+          <a:bodyPr wrap="square" lIns="25400" tIns="12700" rIns="25400" bIns="12700" anchor="t">
             <a:spAutoFit/>
           </a:bodyPr>
           <a:lstStyle/>
